--- a/presentations/NS_L06_CrackingLab_Lesson.pptx
+++ b/presentations/NS_L06_CrackingLab_Lesson.pptx
@@ -19,9 +19,10 @@
     <p:sldId id="267" r:id="rId13"/>
     <p:sldId id="268" r:id="rId14"/>
     <p:sldId id="269" r:id="rId15"/>
+    <p:sldId id="270" r:id="rId16"/>
   </p:sldIdLst>
   <p:notesMasterIdLst>
-    <p:notesMasterId r:id="rId16"/>
+    <p:notesMasterId r:id="rId17"/>
   </p:notesMasterIdLst>
   <p:sldSz cx="12192000" cy="6858000"/>
   <p:notesSz cx="6858000" cy="12192000"/>
@@ -692,7 +693,13 @@
           <a:p>
             <a:r>
               <a:rPr lang="en-US" dirty="0"/>
-              <a:t>Make them commit to an answer on paper before they tap the star. Guessing first costs them the learning.</a:t>
+              <a:t>The answer is A: Every extra character multiplies the number of possible combinations.
+Do not say it yet. Every pupil commits first - fingers, whiteboards or a show of hands on each letter in turn - and you count the split before anyone can change their mind.
+IF MOST OF THE CLASS IS RIGHT: say why it is right in one sentence and go straight on to the independent work.
+IF A SIGNIFICANT GROUP IS ON ONE WRONG LETTER: that option is the misconception to teach against before anyone goes on. Go back to station 3, How long would it take?, and work through its example again, aloud, with the class watching, then re-ask this question.
+The course's own response to a wrong answer here: With 95 possible characters, each extra one multiplies the possibilities by 95.
+A limitation, stated rather than papered over: one response covers every wrong option; it does not say what to revisit for each one. The course does not record what each separate wrong option means, and this slide does not invent it. Decide your own reteach for each option before the lesson; the options above are the start of it.
+This is a real activity from the experience (ns-l06-s3-c2), so the wording here is the wording a pupil will see.</a:t>
             </a:r>
             <a:endParaRPr lang="en-US" dirty="0"/>
           </a:p>
@@ -780,7 +787,7 @@
           <a:p>
             <a:r>
               <a:rPr lang="en-US" dirty="0"/>
-              <a:t>Use these as a settler, or as something for early finishers to read in the experience.</a:t>
+              <a:t>Make them commit to an answer on paper before they tap the star. Guessing first costs them the learning.</a:t>
             </a:r>
             <a:endParaRPr lang="en-US" dirty="0"/>
           </a:p>
@@ -868,7 +875,7 @@
           <a:p>
             <a:r>
               <a:rPr lang="en-US" dirty="0"/>
-              <a:t>Timed and silent. Mark against the answer sheet, then ask students to record their weakest area.</a:t>
+              <a:t>Use these as a settler, or as something for early finishers to read in the experience.</a:t>
             </a:r>
             <a:endParaRPr lang="en-US" dirty="0"/>
           </a:p>
@@ -956,7 +963,7 @@
           <a:p>
             <a:r>
               <a:rPr lang="en-US" dirty="0"/>
-              <a:t>Students copy their score-screen breakdown onto the worksheet, then rate themselves here.</a:t>
+              <a:t>Timed and silent. Mark against the answer sheet, then ask students to record their weakest area.</a:t>
             </a:r>
             <a:endParaRPr lang="en-US" dirty="0"/>
           </a:p>
@@ -980,6 +987,94 @@
             <a:fld id="{F7021451-1387-4CA6-816F-3879F97B5CBC}" type="slidenum">
               <a:rPr lang="en-US"/>
               <a:t>14</a:t>
+            </a:fld>
+            <a:endParaRPr lang="en-US"/>
+          </a:p>
+        </p:txBody>
+      </p:sp>
+    </p:spTree>
+    <p:extLst>
+      <p:ext uri="{BB962C8B-B14F-4D97-AF65-F5344CB8AC3E}">
+        <p14:creationId xmlns:p14="http://schemas.microsoft.com/office/powerpoint/2010/main" val="1024086991"/>
+      </p:ext>
+    </p:extLst>
+  </p:cSld>
+  <p:clrMapOvr>
+    <a:masterClrMapping/>
+  </p:clrMapOvr>
+</p:notes>
+</file>
+
+<file path=ppt/notesSlides/notesSlide15.xml><?xml version="1.0" encoding="utf-8"?>
+<p:notes xmlns:a="http://schemas.openxmlformats.org/drawingml/2006/main" xmlns:r="http://schemas.openxmlformats.org/officeDocument/2006/relationships" xmlns:p="http://schemas.openxmlformats.org/presentationml/2006/main">
+  <p:cSld>
+    <p:spTree>
+      <p:nvGrpSpPr>
+        <p:cNvPr id="1" name=""/>
+        <p:cNvGrpSpPr/>
+        <p:nvPr/>
+      </p:nvGrpSpPr>
+      <p:grpSpPr>
+        <a:xfrm>
+          <a:off x="0" y="0"/>
+          <a:ext cx="0" cy="0"/>
+          <a:chOff x="0" y="0"/>
+          <a:chExt cx="0" cy="0"/>
+        </a:xfrm>
+      </p:grpSpPr>
+      <p:sp>
+        <p:nvSpPr>
+          <p:cNvPr id="2" name="Slide Image Placeholder 1"/>
+          <p:cNvSpPr>
+            <a:spLocks noGrp="1" noRot="1" noChangeAspect="1"/>
+          </p:cNvSpPr>
+          <p:nvPr>
+            <p:ph type="sldImg"/>
+          </p:nvPr>
+        </p:nvSpPr>
+        <p:spPr/>
+      </p:sp>
+      <p:sp>
+        <p:nvSpPr>
+          <p:cNvPr id="3" name="Notes Placeholder 2"/>
+          <p:cNvSpPr>
+            <a:spLocks noGrp="1"/>
+          </p:cNvSpPr>
+          <p:nvPr>
+            <p:ph type="body" idx="1"/>
+          </p:nvPr>
+        </p:nvSpPr>
+        <p:spPr/>
+        <p:txBody>
+          <a:bodyPr/>
+          <a:lstStyle/>
+          <a:p>
+            <a:r>
+              <a:rPr lang="en-US" dirty="0"/>
+              <a:t>Students copy their score-screen breakdown onto the worksheet, then rate themselves here.</a:t>
+            </a:r>
+            <a:endParaRPr lang="en-US" dirty="0"/>
+          </a:p>
+        </p:txBody>
+      </p:sp>
+      <p:sp>
+        <p:nvSpPr>
+          <p:cNvPr id="4" name="Slide Number Placeholder 3"/>
+          <p:cNvSpPr>
+            <a:spLocks noGrp="1"/>
+          </p:cNvSpPr>
+          <p:nvPr>
+            <p:ph type="sldNum" sz="quarter" idx="10"/>
+          </p:nvPr>
+        </p:nvSpPr>
+        <p:spPr/>
+        <p:txBody>
+          <a:bodyPr/>
+          <a:lstStyle/>
+          <a:p>
+            <a:fld id="{F7021451-1387-4CA6-816F-3879F97B5CBC}" type="slidenum">
+              <a:rPr lang="en-US"/>
+              <a:t>15</a:t>
             </a:fld>
             <a:endParaRPr lang="en-US"/>
           </a:p>
@@ -2949,12 +3044,12 @@
         </p:nvSpPr>
         <p:spPr>
           <a:xfrm>
-            <a:off x="502920" y="438912"/>
-            <a:ext cx="3108960" cy="502920"/>
+            <a:off x="502920" y="457200"/>
+            <a:ext cx="1051560" cy="420624"/>
           </a:xfrm>
           <a:prstGeom prst="roundRect">
             <a:avLst>
-              <a:gd name="adj" fmla="val 18182"/>
+              <a:gd name="adj" fmla="val 21739"/>
             </a:avLst>
           </a:prstGeom>
           <a:solidFill>
@@ -2971,8 +3066,8 @@
         </p:nvSpPr>
         <p:spPr>
           <a:xfrm>
-            <a:off x="502920" y="438912"/>
-            <a:ext cx="3108960" cy="502920"/>
+            <a:off x="502920" y="457200"/>
+            <a:ext cx="1051560" cy="420624"/>
           </a:xfrm>
           <a:prstGeom prst="rect">
             <a:avLst/>
@@ -2988,7 +3083,7 @@
               <a:buNone/>
             </a:pPr>
             <a:r>
-              <a:rPr lang="en-US" sz="1300" b="1" dirty="0">
+              <a:rPr lang="en-US" sz="1200" b="1" dirty="0">
                 <a:solidFill>
                   <a:srgbClr val="101828"/>
                 </a:solidFill>
@@ -2996,9 +3091,9 @@
                 <a:ea typeface="IBM Plex Mono" pitchFamily="34" charset="-122"/>
                 <a:cs typeface="IBM Plex Mono" pitchFamily="34" charset="-120"/>
               </a:rPr>
-              <a:t>★  FINAL CHALLENGE</a:t>
-            </a:r>
-            <a:endParaRPr lang="en-US" sz="1300" dirty="0"/>
+              <a:t>CHECK</a:t>
+            </a:r>
+            <a:endParaRPr lang="en-US" sz="1200" dirty="0"/>
           </a:p>
         </p:txBody>
       </p:sp>
@@ -3010,8 +3105,8 @@
         </p:nvSpPr>
         <p:spPr>
           <a:xfrm>
-            <a:off x="502920" y="1097280"/>
-            <a:ext cx="11155680" cy="731520"/>
+            <a:off x="1737360" y="457200"/>
+            <a:ext cx="9875520" cy="420624"/>
           </a:xfrm>
           <a:prstGeom prst="rect">
             <a:avLst/>
@@ -3027,34 +3122,76 @@
               <a:buNone/>
             </a:pPr>
             <a:r>
-              <a:rPr lang="en-US" sz="3400" b="1" dirty="0">
-                <a:solidFill>
-                  <a:srgbClr val="101828"/>
+              <a:rPr lang="en-US" sz="1500" dirty="0">
+                <a:solidFill>
+                  <a:srgbClr val="667085"/>
                 </a:solidFill>
                 <a:latin typeface="IBM Plex Sans" pitchFamily="34" charset="0"/>
                 <a:ea typeface="IBM Plex Sans" pitchFamily="34" charset="-122"/>
                 <a:cs typeface="IBM Plex Sans" pitchFamily="34" charset="-120"/>
               </a:rPr>
-              <a:t>Password strength</a:t>
-            </a:r>
-            <a:endParaRPr lang="en-US" sz="3400" dirty="0"/>
-          </a:p>
-        </p:txBody>
-      </p:sp>
-      <p:sp>
-        <p:nvSpPr>
-          <p:cNvPr id="8" name="Shape 6"/>
+              <a:t>Hands down. Everyone commits.</a:t>
+            </a:r>
+            <a:endParaRPr lang="en-US" sz="1500" dirty="0"/>
+          </a:p>
+        </p:txBody>
+      </p:sp>
+      <p:sp>
+        <p:nvSpPr>
+          <p:cNvPr id="8" name="Text 6"/>
+          <p:cNvSpPr txBox="1"/>
+          <p:nvPr/>
+        </p:nvSpPr>
+        <p:spPr>
+          <a:xfrm>
+            <a:off x="502920" y="1097280"/>
+            <a:ext cx="11155680" cy="914400"/>
+          </a:xfrm>
+          <a:prstGeom prst="rect">
+            <a:avLst/>
+          </a:prstGeom>
+          <a:noFill/>
+          <a:ln/>
+        </p:spPr>
+        <p:txBody>
+          <a:bodyPr wrap="square" lIns="0" tIns="0" rIns="0" bIns="0" rtlCol="0" anchor="ctr"/>
+          <a:lstStyle/>
+          <a:p>
+            <a:pPr indent="0" marL="0">
+              <a:lnSpc>
+                <a:spcPct val="115000"/>
+              </a:lnSpc>
+              <a:buNone/>
+            </a:pPr>
+            <a:r>
+              <a:rPr lang="en-US" sz="2600" b="1" dirty="0">
+                <a:solidFill>
+                  <a:srgbClr val="101828"/>
+                </a:solidFill>
+                <a:latin typeface="IBM Plex Sans" pitchFamily="34" charset="0"/>
+                <a:ea typeface="IBM Plex Sans" pitchFamily="34" charset="-122"/>
+                <a:cs typeface="IBM Plex Sans" pitchFamily="34" charset="-120"/>
+              </a:rPr>
+              <a:t>Why does adding one character make such a difference?</a:t>
+            </a:r>
+            <a:endParaRPr lang="en-US" sz="2600" dirty="0"/>
+          </a:p>
+        </p:txBody>
+      </p:sp>
+      <p:sp>
+        <p:nvSpPr>
+          <p:cNvPr id="9" name="Shape 7"/>
           <p:cNvSpPr/>
           <p:nvPr/>
         </p:nvSpPr>
         <p:spPr>
           <a:xfrm>
-            <a:off x="502920" y="2011680"/>
-            <a:ext cx="11155680" cy="2194560"/>
+            <a:off x="502920" y="2148840"/>
+            <a:ext cx="11155680" cy="731520"/>
           </a:xfrm>
           <a:prstGeom prst="roundRect">
             <a:avLst>
-              <a:gd name="adj" fmla="val 5000"/>
+              <a:gd name="adj" fmla="val 15000"/>
             </a:avLst>
           </a:prstGeom>
           <a:solidFill>
@@ -3062,7 +3199,7 @@
           </a:solidFill>
           <a:ln w="15875">
             <a:solidFill>
-              <a:srgbClr val="2D63FF"/>
+              <a:srgbClr val="D9DEE7"/>
             </a:solidFill>
             <a:prstDash val="solid"/>
           </a:ln>
@@ -3070,14 +3207,75 @@
       </p:sp>
       <p:sp>
         <p:nvSpPr>
-          <p:cNvPr id="9" name="Text 7"/>
-          <p:cNvSpPr txBox="1"/>
-          <p:nvPr/>
-        </p:nvSpPr>
-        <p:spPr>
-          <a:xfrm>
-            <a:off x="1005840" y="2331720"/>
-            <a:ext cx="10149840" cy="1554480"/>
+          <p:cNvPr id="10" name="Shape 8"/>
+          <p:cNvSpPr/>
+          <p:nvPr/>
+        </p:nvSpPr>
+        <p:spPr>
+          <a:xfrm>
+            <a:off x="777240" y="2295144"/>
+            <a:ext cx="438912" cy="438912"/>
+          </a:xfrm>
+          <a:prstGeom prst="roundRect">
+            <a:avLst>
+              <a:gd name="adj" fmla="val 20833"/>
+            </a:avLst>
+          </a:prstGeom>
+          <a:solidFill>
+            <a:srgbClr val="EEF2FB"/>
+          </a:solidFill>
+          <a:ln/>
+        </p:spPr>
+      </p:sp>
+      <p:sp>
+        <p:nvSpPr>
+          <p:cNvPr id="11" name="Text 9"/>
+          <p:cNvSpPr txBox="1"/>
+          <p:nvPr/>
+        </p:nvSpPr>
+        <p:spPr>
+          <a:xfrm>
+            <a:off x="777240" y="2295144"/>
+            <a:ext cx="438912" cy="438912"/>
+          </a:xfrm>
+          <a:prstGeom prst="rect">
+            <a:avLst/>
+          </a:prstGeom>
+          <a:noFill/>
+          <a:ln/>
+        </p:spPr>
+        <p:txBody>
+          <a:bodyPr wrap="square" lIns="0" tIns="0" rIns="0" bIns="0" rtlCol="0" anchor="ctr"/>
+          <a:lstStyle/>
+          <a:p>
+            <a:pPr algn="ctr" indent="0" marL="0">
+              <a:buNone/>
+            </a:pPr>
+            <a:r>
+              <a:rPr lang="en-US" sz="1300" b="1" dirty="0">
+                <a:solidFill>
+                  <a:srgbClr val="2D63FF"/>
+                </a:solidFill>
+                <a:latin typeface="IBM Plex Mono" pitchFamily="34" charset="0"/>
+                <a:ea typeface="IBM Plex Mono" pitchFamily="34" charset="-122"/>
+                <a:cs typeface="IBM Plex Mono" pitchFamily="34" charset="-120"/>
+              </a:rPr>
+              <a:t>A</a:t>
+            </a:r>
+            <a:endParaRPr lang="en-US" sz="1300" dirty="0"/>
+          </a:p>
+        </p:txBody>
+      </p:sp>
+      <p:sp>
+        <p:nvSpPr>
+          <p:cNvPr id="12" name="Text 10"/>
+          <p:cNvSpPr txBox="1"/>
+          <p:nvPr/>
+        </p:nvSpPr>
+        <p:spPr>
+          <a:xfrm>
+            <a:off x="1417320" y="2148840"/>
+            <a:ext cx="10058400" cy="731520"/>
           </a:xfrm>
           <a:prstGeom prst="rect">
             <a:avLst/>
@@ -3091,12 +3289,12 @@
           <a:p>
             <a:pPr indent="0" marL="0">
               <a:lnSpc>
-                <a:spcPct val="130000"/>
+                <a:spcPct val="115000"/>
               </a:lnSpc>
               <a:buNone/>
             </a:pPr>
             <a:r>
-              <a:rPr lang="en-US" sz="2200" dirty="0">
+              <a:rPr lang="en-US" sz="1700" dirty="0">
                 <a:solidFill>
                   <a:srgbClr val="101828"/>
                 </a:solidFill>
@@ -3104,22 +3302,110 @@
                 <a:ea typeface="IBM Plex Sans" pitchFamily="34" charset="-122"/>
                 <a:cs typeface="IBM Plex Sans" pitchFamily="34" charset="-120"/>
               </a:rPr>
-              <a:t>Six passwords have been submitted to the security team. Tap the star and put them in order, weakest first.</a:t>
-            </a:r>
-            <a:endParaRPr lang="en-US" sz="2200" dirty="0"/>
-          </a:p>
-        </p:txBody>
-      </p:sp>
-      <p:sp>
-        <p:nvSpPr>
-          <p:cNvPr id="10" name="Text 8"/>
-          <p:cNvSpPr txBox="1"/>
-          <p:nvPr/>
-        </p:nvSpPr>
-        <p:spPr>
-          <a:xfrm>
-            <a:off x="502920" y="4526280"/>
-            <a:ext cx="11155680" cy="457200"/>
+              <a:t>Every extra character multiplies the number of possible combinations</a:t>
+            </a:r>
+            <a:endParaRPr lang="en-US" sz="1700" dirty="0"/>
+          </a:p>
+        </p:txBody>
+      </p:sp>
+      <p:sp>
+        <p:nvSpPr>
+          <p:cNvPr id="13" name="Shape 11"/>
+          <p:cNvSpPr/>
+          <p:nvPr/>
+        </p:nvSpPr>
+        <p:spPr>
+          <a:xfrm>
+            <a:off x="502920" y="3017520"/>
+            <a:ext cx="11155680" cy="731520"/>
+          </a:xfrm>
+          <a:prstGeom prst="roundRect">
+            <a:avLst>
+              <a:gd name="adj" fmla="val 15000"/>
+            </a:avLst>
+          </a:prstGeom>
+          <a:solidFill>
+            <a:srgbClr val="FFFFFF"/>
+          </a:solidFill>
+          <a:ln w="15875">
+            <a:solidFill>
+              <a:srgbClr val="D9DEE7"/>
+            </a:solidFill>
+            <a:prstDash val="solid"/>
+          </a:ln>
+        </p:spPr>
+      </p:sp>
+      <p:sp>
+        <p:nvSpPr>
+          <p:cNvPr id="14" name="Shape 12"/>
+          <p:cNvSpPr/>
+          <p:nvPr/>
+        </p:nvSpPr>
+        <p:spPr>
+          <a:xfrm>
+            <a:off x="777240" y="3163824"/>
+            <a:ext cx="438912" cy="438912"/>
+          </a:xfrm>
+          <a:prstGeom prst="roundRect">
+            <a:avLst>
+              <a:gd name="adj" fmla="val 20833"/>
+            </a:avLst>
+          </a:prstGeom>
+          <a:solidFill>
+            <a:srgbClr val="EEF2FB"/>
+          </a:solidFill>
+          <a:ln/>
+        </p:spPr>
+      </p:sp>
+      <p:sp>
+        <p:nvSpPr>
+          <p:cNvPr id="15" name="Text 13"/>
+          <p:cNvSpPr txBox="1"/>
+          <p:nvPr/>
+        </p:nvSpPr>
+        <p:spPr>
+          <a:xfrm>
+            <a:off x="777240" y="3163824"/>
+            <a:ext cx="438912" cy="438912"/>
+          </a:xfrm>
+          <a:prstGeom prst="rect">
+            <a:avLst/>
+          </a:prstGeom>
+          <a:noFill/>
+          <a:ln/>
+        </p:spPr>
+        <p:txBody>
+          <a:bodyPr wrap="square" lIns="0" tIns="0" rIns="0" bIns="0" rtlCol="0" anchor="ctr"/>
+          <a:lstStyle/>
+          <a:p>
+            <a:pPr algn="ctr" indent="0" marL="0">
+              <a:buNone/>
+            </a:pPr>
+            <a:r>
+              <a:rPr lang="en-US" sz="1300" b="1" dirty="0">
+                <a:solidFill>
+                  <a:srgbClr val="2D63FF"/>
+                </a:solidFill>
+                <a:latin typeface="IBM Plex Mono" pitchFamily="34" charset="0"/>
+                <a:ea typeface="IBM Plex Mono" pitchFamily="34" charset="-122"/>
+                <a:cs typeface="IBM Plex Mono" pitchFamily="34" charset="-120"/>
+              </a:rPr>
+              <a:t>B</a:t>
+            </a:r>
+            <a:endParaRPr lang="en-US" sz="1300" dirty="0"/>
+          </a:p>
+        </p:txBody>
+      </p:sp>
+      <p:sp>
+        <p:nvSpPr>
+          <p:cNvPr id="16" name="Text 14"/>
+          <p:cNvSpPr txBox="1"/>
+          <p:nvPr/>
+        </p:nvSpPr>
+        <p:spPr>
+          <a:xfrm>
+            <a:off x="1417320" y="3017520"/>
+            <a:ext cx="10058400" cy="731520"/>
           </a:xfrm>
           <a:prstGeom prst="rect">
             <a:avLst/>
@@ -3132,20 +3418,283 @@
           <a:lstStyle/>
           <a:p>
             <a:pPr indent="0" marL="0">
-              <a:buNone/>
-            </a:pPr>
-            <a:r>
-              <a:rPr lang="en-US" sz="1600" dirty="0">
-                <a:solidFill>
-                  <a:srgbClr val="667085"/>
+              <a:lnSpc>
+                <a:spcPct val="115000"/>
+              </a:lnSpc>
+              <a:buNone/>
+            </a:pPr>
+            <a:r>
+              <a:rPr lang="en-US" sz="1700" dirty="0">
+                <a:solidFill>
+                  <a:srgbClr val="101828"/>
                 </a:solidFill>
                 <a:latin typeface="IBM Plex Sans" pitchFamily="34" charset="0"/>
                 <a:ea typeface="IBM Plex Sans" pitchFamily="34" charset="-122"/>
                 <a:cs typeface="IBM Plex Sans" pitchFamily="34" charset="-120"/>
               </a:rPr>
-              <a:t>Predict on paper first, then look down and test it.</a:t>
-            </a:r>
-            <a:endParaRPr lang="en-US" sz="1600" dirty="0"/>
+              <a:t>It confuses the attacker</a:t>
+            </a:r>
+            <a:endParaRPr lang="en-US" sz="1700" dirty="0"/>
+          </a:p>
+        </p:txBody>
+      </p:sp>
+      <p:sp>
+        <p:nvSpPr>
+          <p:cNvPr id="17" name="Shape 15"/>
+          <p:cNvSpPr/>
+          <p:nvPr/>
+        </p:nvSpPr>
+        <p:spPr>
+          <a:xfrm>
+            <a:off x="502920" y="3886200"/>
+            <a:ext cx="11155680" cy="731520"/>
+          </a:xfrm>
+          <a:prstGeom prst="roundRect">
+            <a:avLst>
+              <a:gd name="adj" fmla="val 15000"/>
+            </a:avLst>
+          </a:prstGeom>
+          <a:solidFill>
+            <a:srgbClr val="FFFFFF"/>
+          </a:solidFill>
+          <a:ln w="15875">
+            <a:solidFill>
+              <a:srgbClr val="D9DEE7"/>
+            </a:solidFill>
+            <a:prstDash val="solid"/>
+          </a:ln>
+        </p:spPr>
+      </p:sp>
+      <p:sp>
+        <p:nvSpPr>
+          <p:cNvPr id="18" name="Shape 16"/>
+          <p:cNvSpPr/>
+          <p:nvPr/>
+        </p:nvSpPr>
+        <p:spPr>
+          <a:xfrm>
+            <a:off x="777240" y="4032504"/>
+            <a:ext cx="438912" cy="438912"/>
+          </a:xfrm>
+          <a:prstGeom prst="roundRect">
+            <a:avLst>
+              <a:gd name="adj" fmla="val 20833"/>
+            </a:avLst>
+          </a:prstGeom>
+          <a:solidFill>
+            <a:srgbClr val="EEF2FB"/>
+          </a:solidFill>
+          <a:ln/>
+        </p:spPr>
+      </p:sp>
+      <p:sp>
+        <p:nvSpPr>
+          <p:cNvPr id="19" name="Text 17"/>
+          <p:cNvSpPr txBox="1"/>
+          <p:nvPr/>
+        </p:nvSpPr>
+        <p:spPr>
+          <a:xfrm>
+            <a:off x="777240" y="4032504"/>
+            <a:ext cx="438912" cy="438912"/>
+          </a:xfrm>
+          <a:prstGeom prst="rect">
+            <a:avLst/>
+          </a:prstGeom>
+          <a:noFill/>
+          <a:ln/>
+        </p:spPr>
+        <p:txBody>
+          <a:bodyPr wrap="square" lIns="0" tIns="0" rIns="0" bIns="0" rtlCol="0" anchor="ctr"/>
+          <a:lstStyle/>
+          <a:p>
+            <a:pPr algn="ctr" indent="0" marL="0">
+              <a:buNone/>
+            </a:pPr>
+            <a:r>
+              <a:rPr lang="en-US" sz="1300" b="1" dirty="0">
+                <a:solidFill>
+                  <a:srgbClr val="2D63FF"/>
+                </a:solidFill>
+                <a:latin typeface="IBM Plex Mono" pitchFamily="34" charset="0"/>
+                <a:ea typeface="IBM Plex Mono" pitchFamily="34" charset="-122"/>
+                <a:cs typeface="IBM Plex Mono" pitchFamily="34" charset="-120"/>
+              </a:rPr>
+              <a:t>C</a:t>
+            </a:r>
+            <a:endParaRPr lang="en-US" sz="1300" dirty="0"/>
+          </a:p>
+        </p:txBody>
+      </p:sp>
+      <p:sp>
+        <p:nvSpPr>
+          <p:cNvPr id="20" name="Text 18"/>
+          <p:cNvSpPr txBox="1"/>
+          <p:nvPr/>
+        </p:nvSpPr>
+        <p:spPr>
+          <a:xfrm>
+            <a:off x="1417320" y="3886200"/>
+            <a:ext cx="10058400" cy="731520"/>
+          </a:xfrm>
+          <a:prstGeom prst="rect">
+            <a:avLst/>
+          </a:prstGeom>
+          <a:noFill/>
+          <a:ln/>
+        </p:spPr>
+        <p:txBody>
+          <a:bodyPr wrap="square" lIns="0" tIns="0" rIns="0" bIns="0" rtlCol="0" anchor="ctr"/>
+          <a:lstStyle/>
+          <a:p>
+            <a:pPr indent="0" marL="0">
+              <a:lnSpc>
+                <a:spcPct val="115000"/>
+              </a:lnSpc>
+              <a:buNone/>
+            </a:pPr>
+            <a:r>
+              <a:rPr lang="en-US" sz="1700" dirty="0">
+                <a:solidFill>
+                  <a:srgbClr val="101828"/>
+                </a:solidFill>
+                <a:latin typeface="IBM Plex Sans" pitchFamily="34" charset="0"/>
+                <a:ea typeface="IBM Plex Sans" pitchFamily="34" charset="-122"/>
+                <a:cs typeface="IBM Plex Sans" pitchFamily="34" charset="-120"/>
+              </a:rPr>
+              <a:t>It makes the password encrypted</a:t>
+            </a:r>
+            <a:endParaRPr lang="en-US" sz="1700" dirty="0"/>
+          </a:p>
+        </p:txBody>
+      </p:sp>
+      <p:sp>
+        <p:nvSpPr>
+          <p:cNvPr id="21" name="Shape 19"/>
+          <p:cNvSpPr/>
+          <p:nvPr/>
+        </p:nvSpPr>
+        <p:spPr>
+          <a:xfrm>
+            <a:off x="502920" y="4754880"/>
+            <a:ext cx="11155680" cy="731520"/>
+          </a:xfrm>
+          <a:prstGeom prst="roundRect">
+            <a:avLst>
+              <a:gd name="adj" fmla="val 15000"/>
+            </a:avLst>
+          </a:prstGeom>
+          <a:solidFill>
+            <a:srgbClr val="FFFFFF"/>
+          </a:solidFill>
+          <a:ln w="15875">
+            <a:solidFill>
+              <a:srgbClr val="D9DEE7"/>
+            </a:solidFill>
+            <a:prstDash val="solid"/>
+          </a:ln>
+        </p:spPr>
+      </p:sp>
+      <p:sp>
+        <p:nvSpPr>
+          <p:cNvPr id="22" name="Shape 20"/>
+          <p:cNvSpPr/>
+          <p:nvPr/>
+        </p:nvSpPr>
+        <p:spPr>
+          <a:xfrm>
+            <a:off x="777240" y="4901184"/>
+            <a:ext cx="438912" cy="438912"/>
+          </a:xfrm>
+          <a:prstGeom prst="roundRect">
+            <a:avLst>
+              <a:gd name="adj" fmla="val 20833"/>
+            </a:avLst>
+          </a:prstGeom>
+          <a:solidFill>
+            <a:srgbClr val="EEF2FB"/>
+          </a:solidFill>
+          <a:ln/>
+        </p:spPr>
+      </p:sp>
+      <p:sp>
+        <p:nvSpPr>
+          <p:cNvPr id="23" name="Text 21"/>
+          <p:cNvSpPr txBox="1"/>
+          <p:nvPr/>
+        </p:nvSpPr>
+        <p:spPr>
+          <a:xfrm>
+            <a:off x="777240" y="4901184"/>
+            <a:ext cx="438912" cy="438912"/>
+          </a:xfrm>
+          <a:prstGeom prst="rect">
+            <a:avLst/>
+          </a:prstGeom>
+          <a:noFill/>
+          <a:ln/>
+        </p:spPr>
+        <p:txBody>
+          <a:bodyPr wrap="square" lIns="0" tIns="0" rIns="0" bIns="0" rtlCol="0" anchor="ctr"/>
+          <a:lstStyle/>
+          <a:p>
+            <a:pPr algn="ctr" indent="0" marL="0">
+              <a:buNone/>
+            </a:pPr>
+            <a:r>
+              <a:rPr lang="en-US" sz="1300" b="1" dirty="0">
+                <a:solidFill>
+                  <a:srgbClr val="2D63FF"/>
+                </a:solidFill>
+                <a:latin typeface="IBM Plex Mono" pitchFamily="34" charset="0"/>
+                <a:ea typeface="IBM Plex Mono" pitchFamily="34" charset="-122"/>
+                <a:cs typeface="IBM Plex Mono" pitchFamily="34" charset="-120"/>
+              </a:rPr>
+              <a:t>D</a:t>
+            </a:r>
+            <a:endParaRPr lang="en-US" sz="1300" dirty="0"/>
+          </a:p>
+        </p:txBody>
+      </p:sp>
+      <p:sp>
+        <p:nvSpPr>
+          <p:cNvPr id="24" name="Text 22"/>
+          <p:cNvSpPr txBox="1"/>
+          <p:nvPr/>
+        </p:nvSpPr>
+        <p:spPr>
+          <a:xfrm>
+            <a:off x="1417320" y="4754880"/>
+            <a:ext cx="10058400" cy="731520"/>
+          </a:xfrm>
+          <a:prstGeom prst="rect">
+            <a:avLst/>
+          </a:prstGeom>
+          <a:noFill/>
+          <a:ln/>
+        </p:spPr>
+        <p:txBody>
+          <a:bodyPr wrap="square" lIns="0" tIns="0" rIns="0" bIns="0" rtlCol="0" anchor="ctr"/>
+          <a:lstStyle/>
+          <a:p>
+            <a:pPr indent="0" marL="0">
+              <a:lnSpc>
+                <a:spcPct val="115000"/>
+              </a:lnSpc>
+              <a:buNone/>
+            </a:pPr>
+            <a:r>
+              <a:rPr lang="en-US" sz="1700" dirty="0">
+                <a:solidFill>
+                  <a:srgbClr val="101828"/>
+                </a:solidFill>
+                <a:latin typeface="IBM Plex Sans" pitchFamily="34" charset="0"/>
+                <a:ea typeface="IBM Plex Sans" pitchFamily="34" charset="-122"/>
+                <a:cs typeface="IBM Plex Sans" pitchFamily="34" charset="-120"/>
+              </a:rPr>
+              <a:t>It blocks the login page</a:t>
+            </a:r>
+            <a:endParaRPr lang="en-US" sz="1700" dirty="0"/>
           </a:p>
         </p:txBody>
       </p:sp>
@@ -3281,14 +3830,75 @@
       </p:sp>
       <p:sp>
         <p:nvSpPr>
-          <p:cNvPr id="5" name="Text 3"/>
-          <p:cNvSpPr txBox="1"/>
-          <p:nvPr/>
-        </p:nvSpPr>
-        <p:spPr>
-          <a:xfrm>
-            <a:off x="502920" y="411480"/>
-            <a:ext cx="11155680" cy="777240"/>
+          <p:cNvPr id="5" name="Shape 3"/>
+          <p:cNvSpPr/>
+          <p:nvPr/>
+        </p:nvSpPr>
+        <p:spPr>
+          <a:xfrm>
+            <a:off x="502920" y="438912"/>
+            <a:ext cx="3108960" cy="502920"/>
+          </a:xfrm>
+          <a:prstGeom prst="roundRect">
+            <a:avLst>
+              <a:gd name="adj" fmla="val 18182"/>
+            </a:avLst>
+          </a:prstGeom>
+          <a:solidFill>
+            <a:srgbClr val="F4B942"/>
+          </a:solidFill>
+          <a:ln/>
+        </p:spPr>
+      </p:sp>
+      <p:sp>
+        <p:nvSpPr>
+          <p:cNvPr id="6" name="Text 4"/>
+          <p:cNvSpPr txBox="1"/>
+          <p:nvPr/>
+        </p:nvSpPr>
+        <p:spPr>
+          <a:xfrm>
+            <a:off x="502920" y="438912"/>
+            <a:ext cx="3108960" cy="502920"/>
+          </a:xfrm>
+          <a:prstGeom prst="rect">
+            <a:avLst/>
+          </a:prstGeom>
+          <a:noFill/>
+          <a:ln/>
+        </p:spPr>
+        <p:txBody>
+          <a:bodyPr wrap="square" lIns="0" tIns="0" rIns="0" bIns="0" rtlCol="0" anchor="ctr"/>
+          <a:lstStyle/>
+          <a:p>
+            <a:pPr algn="ctr" indent="0" marL="0">
+              <a:buNone/>
+            </a:pPr>
+            <a:r>
+              <a:rPr lang="en-US" sz="1300" b="1" dirty="0">
+                <a:solidFill>
+                  <a:srgbClr val="101828"/>
+                </a:solidFill>
+                <a:latin typeface="IBM Plex Mono" pitchFamily="34" charset="0"/>
+                <a:ea typeface="IBM Plex Mono" pitchFamily="34" charset="-122"/>
+                <a:cs typeface="IBM Plex Mono" pitchFamily="34" charset="-120"/>
+              </a:rPr>
+              <a:t>★  FINAL CHALLENGE</a:t>
+            </a:r>
+            <a:endParaRPr lang="en-US" sz="1300" dirty="0"/>
+          </a:p>
+        </p:txBody>
+      </p:sp>
+      <p:sp>
+        <p:nvSpPr>
+          <p:cNvPr id="7" name="Text 5"/>
+          <p:cNvSpPr txBox="1"/>
+          <p:nvPr/>
+        </p:nvSpPr>
+        <p:spPr>
+          <a:xfrm>
+            <a:off x="502920" y="1097280"/>
+            <a:ext cx="11155680" cy="731520"/>
           </a:xfrm>
           <a:prstGeom prst="rect">
             <a:avLst/>
@@ -3304,7 +3914,7 @@
               <a:buNone/>
             </a:pPr>
             <a:r>
-              <a:rPr lang="en-US" sz="3200" b="1" dirty="0">
+              <a:rPr lang="en-US" sz="3400" b="1" dirty="0">
                 <a:solidFill>
                   <a:srgbClr val="101828"/>
                 </a:solidFill>
@@ -3312,65 +3922,26 @@
                 <a:ea typeface="IBM Plex Sans" pitchFamily="34" charset="-122"/>
                 <a:cs typeface="IBM Plex Sans" pitchFamily="34" charset="-120"/>
               </a:rPr>
-              <a:t>Worth knowing</a:t>
-            </a:r>
-            <a:endParaRPr lang="en-US" sz="3200" dirty="0"/>
-          </a:p>
-        </p:txBody>
-      </p:sp>
-      <p:sp>
-        <p:nvSpPr>
-          <p:cNvPr id="6" name="Text 4"/>
-          <p:cNvSpPr txBox="1"/>
-          <p:nvPr/>
-        </p:nvSpPr>
-        <p:spPr>
-          <a:xfrm>
-            <a:off x="502920" y="1170432"/>
-            <a:ext cx="11155680" cy="411480"/>
-          </a:xfrm>
-          <a:prstGeom prst="rect">
-            <a:avLst/>
-          </a:prstGeom>
-          <a:noFill/>
-          <a:ln/>
-        </p:spPr>
-        <p:txBody>
-          <a:bodyPr wrap="square" lIns="0" tIns="0" rIns="0" bIns="0" rtlCol="0" anchor="ctr"/>
-          <a:lstStyle/>
-          <a:p>
-            <a:pPr indent="0" marL="0">
-              <a:buNone/>
-            </a:pPr>
-            <a:r>
-              <a:rPr lang="en-US" sz="1500" dirty="0">
-                <a:solidFill>
-                  <a:srgbClr val="667085"/>
-                </a:solidFill>
-                <a:latin typeface="IBM Plex Sans" pitchFamily="34" charset="0"/>
-                <a:ea typeface="IBM Plex Sans" pitchFamily="34" charset="-122"/>
-                <a:cs typeface="IBM Plex Sans" pitchFamily="34" charset="-120"/>
-              </a:rPr>
-              <a:t>The information markers dotted around the room</a:t>
-            </a:r>
-            <a:endParaRPr lang="en-US" sz="1500" dirty="0"/>
-          </a:p>
-        </p:txBody>
-      </p:sp>
-      <p:sp>
-        <p:nvSpPr>
-          <p:cNvPr id="7" name="Shape 5"/>
+              <a:t>Password strength</a:t>
+            </a:r>
+            <a:endParaRPr lang="en-US" sz="3400" dirty="0"/>
+          </a:p>
+        </p:txBody>
+      </p:sp>
+      <p:sp>
+        <p:nvSpPr>
+          <p:cNvPr id="8" name="Shape 6"/>
           <p:cNvSpPr/>
           <p:nvPr/>
         </p:nvSpPr>
         <p:spPr>
           <a:xfrm>
-            <a:off x="502920" y="1828800"/>
-            <a:ext cx="5394960" cy="1737360"/>
+            <a:off x="502920" y="2011680"/>
+            <a:ext cx="11155680" cy="2194560"/>
           </a:xfrm>
           <a:prstGeom prst="roundRect">
             <a:avLst>
-              <a:gd name="adj" fmla="val 6316"/>
+              <a:gd name="adj" fmla="val 5000"/>
             </a:avLst>
           </a:prstGeom>
           <a:solidFill>
@@ -3386,14 +3957,14 @@
       </p:sp>
       <p:sp>
         <p:nvSpPr>
-          <p:cNvPr id="8" name="Text 6"/>
-          <p:cNvSpPr txBox="1"/>
-          <p:nvPr/>
-        </p:nvSpPr>
-        <p:spPr>
-          <a:xfrm>
-            <a:off x="822960" y="2011680"/>
-            <a:ext cx="4754880" cy="365760"/>
+          <p:cNvPr id="9" name="Text 7"/>
+          <p:cNvSpPr txBox="1"/>
+          <p:nvPr/>
+        </p:nvSpPr>
+        <p:spPr>
+          <a:xfrm>
+            <a:off x="1005840" y="2331720"/>
+            <a:ext cx="10149840" cy="1554480"/>
           </a:xfrm>
           <a:prstGeom prst="rect">
             <a:avLst/>
@@ -3406,52 +3977,52 @@
           <a:lstStyle/>
           <a:p>
             <a:pPr indent="0" marL="0">
-              <a:buNone/>
-            </a:pPr>
-            <a:r>
-              <a:rPr lang="en-US" sz="1600" b="1" dirty="0">
-                <a:solidFill>
-                  <a:srgbClr val="2D63FF"/>
+              <a:lnSpc>
+                <a:spcPct val="130000"/>
+              </a:lnSpc>
+              <a:buNone/>
+            </a:pPr>
+            <a:r>
+              <a:rPr lang="en-US" sz="2200" dirty="0">
+                <a:solidFill>
+                  <a:srgbClr val="101828"/>
                 </a:solidFill>
                 <a:latin typeface="IBM Plex Sans" pitchFamily="34" charset="0"/>
                 <a:ea typeface="IBM Plex Sans" pitchFamily="34" charset="-122"/>
                 <a:cs typeface="IBM Plex Sans" pitchFamily="34" charset="-120"/>
               </a:rPr>
-              <a:t>Billions per second</a:t>
-            </a:r>
-            <a:endParaRPr lang="en-US" sz="1600" dirty="0"/>
-          </a:p>
-        </p:txBody>
-      </p:sp>
-      <p:sp>
-        <p:nvSpPr>
-          <p:cNvPr id="9" name="Text 7"/>
-          <p:cNvSpPr txBox="1"/>
-          <p:nvPr/>
-        </p:nvSpPr>
-        <p:spPr>
-          <a:xfrm>
-            <a:off x="822960" y="2395728"/>
-            <a:ext cx="4754880" cy="1005840"/>
-          </a:xfrm>
-          <a:prstGeom prst="rect">
-            <a:avLst/>
-          </a:prstGeom>
-          <a:noFill/>
-          <a:ln/>
-        </p:spPr>
-        <p:txBody>
-          <a:bodyPr wrap="square" lIns="0" tIns="0" rIns="0" bIns="0" rtlCol="0" anchor="t"/>
+              <a:t>Six passwords have been submitted to the security team. Tap the star and put them in order, weakest first.</a:t>
+            </a:r>
+            <a:endParaRPr lang="en-US" sz="2200" dirty="0"/>
+          </a:p>
+        </p:txBody>
+      </p:sp>
+      <p:sp>
+        <p:nvSpPr>
+          <p:cNvPr id="10" name="Text 8"/>
+          <p:cNvSpPr txBox="1"/>
+          <p:nvPr/>
+        </p:nvSpPr>
+        <p:spPr>
+          <a:xfrm>
+            <a:off x="502920" y="4526280"/>
+            <a:ext cx="11155680" cy="457200"/>
+          </a:xfrm>
+          <a:prstGeom prst="rect">
+            <a:avLst/>
+          </a:prstGeom>
+          <a:noFill/>
+          <a:ln/>
+        </p:spPr>
+        <p:txBody>
+          <a:bodyPr wrap="square" lIns="0" tIns="0" rIns="0" bIns="0" rtlCol="0" anchor="ctr"/>
           <a:lstStyle/>
           <a:p>
             <a:pPr indent="0" marL="0">
-              <a:lnSpc>
-                <a:spcPct val="120000"/>
-              </a:lnSpc>
-              <a:buNone/>
-            </a:pPr>
-            <a:r>
-              <a:rPr lang="en-US" sz="1300" dirty="0">
+              <a:buNone/>
+            </a:pPr>
+            <a:r>
+              <a:rPr lang="en-US" sz="1600" dirty="0">
                 <a:solidFill>
                   <a:srgbClr val="667085"/>
                 </a:solidFill>
@@ -3459,333 +4030,9 @@
                 <a:ea typeface="IBM Plex Sans" pitchFamily="34" charset="-122"/>
                 <a:cs typeface="IBM Plex Sans" pitchFamily="34" charset="-120"/>
               </a:rPr>
-              <a:t>A powerful computer with graphics cards can test billions of password guesses per second against a stolen list of hashes.</a:t>
-            </a:r>
-            <a:endParaRPr lang="en-US" sz="1300" dirty="0"/>
-          </a:p>
-        </p:txBody>
-      </p:sp>
-      <p:sp>
-        <p:nvSpPr>
-          <p:cNvPr id="10" name="Shape 8"/>
-          <p:cNvSpPr/>
-          <p:nvPr/>
-        </p:nvSpPr>
-        <p:spPr>
-          <a:xfrm>
-            <a:off x="6217920" y="1828800"/>
-            <a:ext cx="5394960" cy="1737360"/>
-          </a:xfrm>
-          <a:prstGeom prst="roundRect">
-            <a:avLst>
-              <a:gd name="adj" fmla="val 6316"/>
-            </a:avLst>
-          </a:prstGeom>
-          <a:solidFill>
-            <a:srgbClr val="FFFFFF"/>
-          </a:solidFill>
-          <a:ln w="15875">
-            <a:solidFill>
-              <a:srgbClr val="08A6A6"/>
-            </a:solidFill>
-            <a:prstDash val="solid"/>
-          </a:ln>
-        </p:spPr>
-      </p:sp>
-      <p:sp>
-        <p:nvSpPr>
-          <p:cNvPr id="11" name="Text 9"/>
-          <p:cNvSpPr txBox="1"/>
-          <p:nvPr/>
-        </p:nvSpPr>
-        <p:spPr>
-          <a:xfrm>
-            <a:off x="6537960" y="2011680"/>
-            <a:ext cx="4754880" cy="365760"/>
-          </a:xfrm>
-          <a:prstGeom prst="rect">
-            <a:avLst/>
-          </a:prstGeom>
-          <a:noFill/>
-          <a:ln/>
-        </p:spPr>
-        <p:txBody>
-          <a:bodyPr wrap="square" lIns="0" tIns="0" rIns="0" bIns="0" rtlCol="0" anchor="ctr"/>
-          <a:lstStyle/>
-          <a:p>
-            <a:pPr indent="0" marL="0">
-              <a:buNone/>
-            </a:pPr>
-            <a:r>
-              <a:rPr lang="en-US" sz="1600" b="1" dirty="0">
-                <a:solidFill>
-                  <a:srgbClr val="08A6A6"/>
-                </a:solidFill>
-                <a:latin typeface="IBM Plex Sans" pitchFamily="34" charset="0"/>
-                <a:ea typeface="IBM Plex Sans" pitchFamily="34" charset="-122"/>
-                <a:cs typeface="IBM Plex Sans" pitchFamily="34" charset="-120"/>
-              </a:rPr>
-              <a:t>The top password</a:t>
+              <a:t>Predict on paper first, then look down and test it.</a:t>
             </a:r>
             <a:endParaRPr lang="en-US" sz="1600" dirty="0"/>
-          </a:p>
-        </p:txBody>
-      </p:sp>
-      <p:sp>
-        <p:nvSpPr>
-          <p:cNvPr id="12" name="Text 10"/>
-          <p:cNvSpPr txBox="1"/>
-          <p:nvPr/>
-        </p:nvSpPr>
-        <p:spPr>
-          <a:xfrm>
-            <a:off x="6537960" y="2395728"/>
-            <a:ext cx="4754880" cy="1005840"/>
-          </a:xfrm>
-          <a:prstGeom prst="rect">
-            <a:avLst/>
-          </a:prstGeom>
-          <a:noFill/>
-          <a:ln/>
-        </p:spPr>
-        <p:txBody>
-          <a:bodyPr wrap="square" lIns="0" tIns="0" rIns="0" bIns="0" rtlCol="0" anchor="t"/>
-          <a:lstStyle/>
-          <a:p>
-            <a:pPr indent="0" marL="0">
-              <a:lnSpc>
-                <a:spcPct val="120000"/>
-              </a:lnSpc>
-              <a:buNone/>
-            </a:pPr>
-            <a:r>
-              <a:rPr lang="en-US" sz="1300" dirty="0">
-                <a:solidFill>
-                  <a:srgbClr val="667085"/>
-                </a:solidFill>
-                <a:latin typeface="IBM Plex Sans" pitchFamily="34" charset="0"/>
-                <a:ea typeface="IBM Plex Sans" pitchFamily="34" charset="-122"/>
-                <a:cs typeface="IBM Plex Sans" pitchFamily="34" charset="-120"/>
-              </a:rPr>
-              <a:t>Lists of leaked passwords are still topped by '123456'. It's usually the first guess an attacker makes.</a:t>
-            </a:r>
-            <a:endParaRPr lang="en-US" sz="1300" dirty="0"/>
-          </a:p>
-        </p:txBody>
-      </p:sp>
-      <p:sp>
-        <p:nvSpPr>
-          <p:cNvPr id="13" name="Shape 11"/>
-          <p:cNvSpPr/>
-          <p:nvPr/>
-        </p:nvSpPr>
-        <p:spPr>
-          <a:xfrm>
-            <a:off x="502920" y="3794760"/>
-            <a:ext cx="5394960" cy="1737360"/>
-          </a:xfrm>
-          <a:prstGeom prst="roundRect">
-            <a:avLst>
-              <a:gd name="adj" fmla="val 6316"/>
-            </a:avLst>
-          </a:prstGeom>
-          <a:solidFill>
-            <a:srgbClr val="FFFFFF"/>
-          </a:solidFill>
-          <a:ln w="15875">
-            <a:solidFill>
-              <a:srgbClr val="2D63FF"/>
-            </a:solidFill>
-            <a:prstDash val="solid"/>
-          </a:ln>
-        </p:spPr>
-      </p:sp>
-      <p:sp>
-        <p:nvSpPr>
-          <p:cNvPr id="14" name="Text 12"/>
-          <p:cNvSpPr txBox="1"/>
-          <p:nvPr/>
-        </p:nvSpPr>
-        <p:spPr>
-          <a:xfrm>
-            <a:off x="822960" y="3977640"/>
-            <a:ext cx="4754880" cy="365760"/>
-          </a:xfrm>
-          <a:prstGeom prst="rect">
-            <a:avLst/>
-          </a:prstGeom>
-          <a:noFill/>
-          <a:ln/>
-        </p:spPr>
-        <p:txBody>
-          <a:bodyPr wrap="square" lIns="0" tIns="0" rIns="0" bIns="0" rtlCol="0" anchor="ctr"/>
-          <a:lstStyle/>
-          <a:p>
-            <a:pPr indent="0" marL="0">
-              <a:buNone/>
-            </a:pPr>
-            <a:r>
-              <a:rPr lang="en-US" sz="1600" b="1" dirty="0">
-                <a:solidFill>
-                  <a:srgbClr val="2D63FF"/>
-                </a:solidFill>
-                <a:latin typeface="IBM Plex Sans" pitchFamily="34" charset="0"/>
-                <a:ea typeface="IBM Plex Sans" pitchFamily="34" charset="-122"/>
-                <a:cs typeface="IBM Plex Sans" pitchFamily="34" charset="-120"/>
-              </a:rPr>
-              <a:t>Have I been pwned</a:t>
-            </a:r>
-            <a:endParaRPr lang="en-US" sz="1600" dirty="0"/>
-          </a:p>
-        </p:txBody>
-      </p:sp>
-      <p:sp>
-        <p:nvSpPr>
-          <p:cNvPr id="15" name="Text 13"/>
-          <p:cNvSpPr txBox="1"/>
-          <p:nvPr/>
-        </p:nvSpPr>
-        <p:spPr>
-          <a:xfrm>
-            <a:off x="822960" y="4361688"/>
-            <a:ext cx="4754880" cy="1005840"/>
-          </a:xfrm>
-          <a:prstGeom prst="rect">
-            <a:avLst/>
-          </a:prstGeom>
-          <a:noFill/>
-          <a:ln/>
-        </p:spPr>
-        <p:txBody>
-          <a:bodyPr wrap="square" lIns="0" tIns="0" rIns="0" bIns="0" rtlCol="0" anchor="t"/>
-          <a:lstStyle/>
-          <a:p>
-            <a:pPr indent="0" marL="0">
-              <a:lnSpc>
-                <a:spcPct val="120000"/>
-              </a:lnSpc>
-              <a:buNone/>
-            </a:pPr>
-            <a:r>
-              <a:rPr lang="en-US" sz="1300" dirty="0">
-                <a:solidFill>
-                  <a:srgbClr val="667085"/>
-                </a:solidFill>
-                <a:latin typeface="IBM Plex Sans" pitchFamily="34" charset="0"/>
-                <a:ea typeface="IBM Plex Sans" pitchFamily="34" charset="-122"/>
-                <a:cs typeface="IBM Plex Sans" pitchFamily="34" charset="-120"/>
-              </a:rPr>
-              <a:t>Free services let you check whether your email address has appeared in a known data breach, so you know which passwords to change.</a:t>
-            </a:r>
-            <a:endParaRPr lang="en-US" sz="1300" dirty="0"/>
-          </a:p>
-        </p:txBody>
-      </p:sp>
-      <p:sp>
-        <p:nvSpPr>
-          <p:cNvPr id="16" name="Shape 14"/>
-          <p:cNvSpPr/>
-          <p:nvPr/>
-        </p:nvSpPr>
-        <p:spPr>
-          <a:xfrm>
-            <a:off x="6217920" y="3794760"/>
-            <a:ext cx="5394960" cy="1737360"/>
-          </a:xfrm>
-          <a:prstGeom prst="roundRect">
-            <a:avLst>
-              <a:gd name="adj" fmla="val 6316"/>
-            </a:avLst>
-          </a:prstGeom>
-          <a:solidFill>
-            <a:srgbClr val="FFFFFF"/>
-          </a:solidFill>
-          <a:ln w="15875">
-            <a:solidFill>
-              <a:srgbClr val="08A6A6"/>
-            </a:solidFill>
-            <a:prstDash val="solid"/>
-          </a:ln>
-        </p:spPr>
-      </p:sp>
-      <p:sp>
-        <p:nvSpPr>
-          <p:cNvPr id="17" name="Text 15"/>
-          <p:cNvSpPr txBox="1"/>
-          <p:nvPr/>
-        </p:nvSpPr>
-        <p:spPr>
-          <a:xfrm>
-            <a:off x="6537960" y="3977640"/>
-            <a:ext cx="4754880" cy="365760"/>
-          </a:xfrm>
-          <a:prstGeom prst="rect">
-            <a:avLst/>
-          </a:prstGeom>
-          <a:noFill/>
-          <a:ln/>
-        </p:spPr>
-        <p:txBody>
-          <a:bodyPr wrap="square" lIns="0" tIns="0" rIns="0" bIns="0" rtlCol="0" anchor="ctr"/>
-          <a:lstStyle/>
-          <a:p>
-            <a:pPr indent="0" marL="0">
-              <a:buNone/>
-            </a:pPr>
-            <a:r>
-              <a:rPr lang="en-US" sz="1600" b="1" dirty="0">
-                <a:solidFill>
-                  <a:srgbClr val="08A6A6"/>
-                </a:solidFill>
-                <a:latin typeface="IBM Plex Sans" pitchFamily="34" charset="0"/>
-                <a:ea typeface="IBM Plex Sans" pitchFamily="34" charset="-122"/>
-                <a:cs typeface="IBM Plex Sans" pitchFamily="34" charset="-120"/>
-              </a:rPr>
-              <a:t>Three random words</a:t>
-            </a:r>
-            <a:endParaRPr lang="en-US" sz="1600" dirty="0"/>
-          </a:p>
-        </p:txBody>
-      </p:sp>
-      <p:sp>
-        <p:nvSpPr>
-          <p:cNvPr id="18" name="Text 16"/>
-          <p:cNvSpPr txBox="1"/>
-          <p:nvPr/>
-        </p:nvSpPr>
-        <p:spPr>
-          <a:xfrm>
-            <a:off x="6537960" y="4361688"/>
-            <a:ext cx="4754880" cy="1005840"/>
-          </a:xfrm>
-          <a:prstGeom prst="rect">
-            <a:avLst/>
-          </a:prstGeom>
-          <a:noFill/>
-          <a:ln/>
-        </p:spPr>
-        <p:txBody>
-          <a:bodyPr wrap="square" lIns="0" tIns="0" rIns="0" bIns="0" rtlCol="0" anchor="t"/>
-          <a:lstStyle/>
-          <a:p>
-            <a:pPr indent="0" marL="0">
-              <a:lnSpc>
-                <a:spcPct val="120000"/>
-              </a:lnSpc>
-              <a:buNone/>
-            </a:pPr>
-            <a:r>
-              <a:rPr lang="en-US" sz="1300" dirty="0">
-                <a:solidFill>
-                  <a:srgbClr val="667085"/>
-                </a:solidFill>
-                <a:latin typeface="IBM Plex Sans" pitchFamily="34" charset="0"/>
-                <a:ea typeface="IBM Plex Sans" pitchFamily="34" charset="-122"/>
-                <a:cs typeface="IBM Plex Sans" pitchFamily="34" charset="-120"/>
-              </a:rPr>
-              <a:t>The UK's National Cyber Security Centre recommends three random words as a password: long, strong and easy to remember.</a:t>
-            </a:r>
-            <a:endParaRPr lang="en-US" sz="1300" dirty="0"/>
           </a:p>
         </p:txBody>
       </p:sp>
@@ -3952,7 +4199,7 @@
                 <a:ea typeface="IBM Plex Sans" pitchFamily="34" charset="-122"/>
                 <a:cs typeface="IBM Plex Sans" pitchFamily="34" charset="-120"/>
               </a:rPr>
-              <a:t>Exam practice</a:t>
+              <a:t>Worth knowing</a:t>
             </a:r>
             <a:endParaRPr lang="en-US" sz="3200" dirty="0"/>
           </a:p>
@@ -3991,7 +4238,7 @@
                 <a:ea typeface="IBM Plex Sans" pitchFamily="34" charset="-122"/>
                 <a:cs typeface="IBM Plex Sans" pitchFamily="34" charset="-120"/>
               </a:rPr>
-              <a:t>Devices away. Answer from memory on the worksheet.</a:t>
+              <a:t>The information markers dotted around the room</a:t>
             </a:r>
             <a:endParaRPr lang="en-US" sz="1500" dirty="0"/>
           </a:p>
@@ -4006,11 +4253,11 @@
         <p:spPr>
           <a:xfrm>
             <a:off x="502920" y="1828800"/>
-            <a:ext cx="11155680" cy="1097280"/>
+            <a:ext cx="5394960" cy="1737360"/>
           </a:xfrm>
           <a:prstGeom prst="roundRect">
             <a:avLst>
-              <a:gd name="adj" fmla="val 10000"/>
+              <a:gd name="adj" fmla="val 6316"/>
             </a:avLst>
           </a:prstGeom>
           <a:solidFill>
@@ -4018,7 +4265,7 @@
           </a:solidFill>
           <a:ln w="15875">
             <a:solidFill>
-              <a:srgbClr val="D9DEE7"/>
+              <a:srgbClr val="2D63FF"/>
             </a:solidFill>
             <a:prstDash val="solid"/>
           </a:ln>
@@ -4032,8 +4279,8 @@
         </p:nvSpPr>
         <p:spPr>
           <a:xfrm>
-            <a:off x="914400" y="1938528"/>
-            <a:ext cx="9418320" cy="877824"/>
+            <a:off x="822960" y="2011680"/>
+            <a:ext cx="4754880" cy="365760"/>
           </a:xfrm>
           <a:prstGeom prst="rect">
             <a:avLst/>
@@ -4046,101 +4293,79 @@
           <a:lstStyle/>
           <a:p>
             <a:pPr indent="0" marL="0">
-              <a:lnSpc>
-                <a:spcPct val="118000"/>
-              </a:lnSpc>
-              <a:buNone/>
-            </a:pPr>
-            <a:r>
-              <a:rPr lang="en-US" sz="1700" dirty="0">
-                <a:solidFill>
-                  <a:srgbClr val="101828"/>
+              <a:buNone/>
+            </a:pPr>
+            <a:r>
+              <a:rPr lang="en-US" sz="1600" b="1" dirty="0">
+                <a:solidFill>
+                  <a:srgbClr val="2D63FF"/>
                 </a:solidFill>
                 <a:latin typeface="IBM Plex Sans" pitchFamily="34" charset="0"/>
                 <a:ea typeface="IBM Plex Sans" pitchFamily="34" charset="-122"/>
                 <a:cs typeface="IBM Plex Sans" pitchFamily="34" charset="-120"/>
               </a:rPr>
-              <a:t>Describe how a brute-force attack works.</a:t>
-            </a:r>
-            <a:endParaRPr lang="en-US" sz="1700" dirty="0"/>
-          </a:p>
-        </p:txBody>
-      </p:sp>
-      <p:sp>
-        <p:nvSpPr>
-          <p:cNvPr id="9" name="Shape 7"/>
+              <a:t>Billions per second</a:t>
+            </a:r>
+            <a:endParaRPr lang="en-US" sz="1600" dirty="0"/>
+          </a:p>
+        </p:txBody>
+      </p:sp>
+      <p:sp>
+        <p:nvSpPr>
+          <p:cNvPr id="9" name="Text 7"/>
+          <p:cNvSpPr txBox="1"/>
+          <p:nvPr/>
+        </p:nvSpPr>
+        <p:spPr>
+          <a:xfrm>
+            <a:off x="822960" y="2395728"/>
+            <a:ext cx="4754880" cy="1005840"/>
+          </a:xfrm>
+          <a:prstGeom prst="rect">
+            <a:avLst/>
+          </a:prstGeom>
+          <a:noFill/>
+          <a:ln/>
+        </p:spPr>
+        <p:txBody>
+          <a:bodyPr wrap="square" lIns="0" tIns="0" rIns="0" bIns="0" rtlCol="0" anchor="t"/>
+          <a:lstStyle/>
+          <a:p>
+            <a:pPr indent="0" marL="0">
+              <a:lnSpc>
+                <a:spcPct val="120000"/>
+              </a:lnSpc>
+              <a:buNone/>
+            </a:pPr>
+            <a:r>
+              <a:rPr lang="en-US" sz="1300" dirty="0">
+                <a:solidFill>
+                  <a:srgbClr val="667085"/>
+                </a:solidFill>
+                <a:latin typeface="IBM Plex Sans" pitchFamily="34" charset="0"/>
+                <a:ea typeface="IBM Plex Sans" pitchFamily="34" charset="-122"/>
+                <a:cs typeface="IBM Plex Sans" pitchFamily="34" charset="-120"/>
+              </a:rPr>
+              <a:t>A powerful computer with graphics cards can test billions of password guesses per second against a stolen list of hashes.</a:t>
+            </a:r>
+            <a:endParaRPr lang="en-US" sz="1300" dirty="0"/>
+          </a:p>
+        </p:txBody>
+      </p:sp>
+      <p:sp>
+        <p:nvSpPr>
+          <p:cNvPr id="10" name="Shape 8"/>
           <p:cNvSpPr/>
           <p:nvPr/>
         </p:nvSpPr>
         <p:spPr>
           <a:xfrm>
-            <a:off x="10515600" y="2130552"/>
-            <a:ext cx="868680" cy="493776"/>
+            <a:off x="6217920" y="1828800"/>
+            <a:ext cx="5394960" cy="1737360"/>
           </a:xfrm>
           <a:prstGeom prst="roundRect">
             <a:avLst>
-              <a:gd name="adj" fmla="val 18519"/>
-            </a:avLst>
-          </a:prstGeom>
-          <a:solidFill>
-            <a:srgbClr val="EEF2FB"/>
-          </a:solidFill>
-          <a:ln/>
-        </p:spPr>
-      </p:sp>
-      <p:sp>
-        <p:nvSpPr>
-          <p:cNvPr id="10" name="Text 8"/>
-          <p:cNvSpPr txBox="1"/>
-          <p:nvPr/>
-        </p:nvSpPr>
-        <p:spPr>
-          <a:xfrm>
-            <a:off x="10515600" y="2130552"/>
-            <a:ext cx="868680" cy="493776"/>
-          </a:xfrm>
-          <a:prstGeom prst="rect">
-            <a:avLst/>
-          </a:prstGeom>
-          <a:noFill/>
-          <a:ln/>
-        </p:spPr>
-        <p:txBody>
-          <a:bodyPr wrap="square" lIns="0" tIns="0" rIns="0" bIns="0" rtlCol="0" anchor="ctr"/>
-          <a:lstStyle/>
-          <a:p>
-            <a:pPr algn="ctr" indent="0" marL="0">
-              <a:buNone/>
-            </a:pPr>
-            <a:r>
-              <a:rPr lang="en-US" sz="1500" b="1" dirty="0">
-                <a:solidFill>
-                  <a:srgbClr val="2D63FF"/>
-                </a:solidFill>
-                <a:latin typeface="IBM Plex Mono" pitchFamily="34" charset="0"/>
-                <a:ea typeface="IBM Plex Mono" pitchFamily="34" charset="-122"/>
-                <a:cs typeface="IBM Plex Mono" pitchFamily="34" charset="-120"/>
-              </a:rPr>
-              <a:t>[2]</a:t>
-            </a:r>
-            <a:endParaRPr lang="en-US" sz="1500" dirty="0"/>
-          </a:p>
-        </p:txBody>
-      </p:sp>
-      <p:sp>
-        <p:nvSpPr>
-          <p:cNvPr id="11" name="Shape 9"/>
-          <p:cNvSpPr/>
-          <p:nvPr/>
-        </p:nvSpPr>
-        <p:spPr>
-          <a:xfrm>
-            <a:off x="502920" y="3127248"/>
-            <a:ext cx="11155680" cy="1097280"/>
-          </a:xfrm>
-          <a:prstGeom prst="roundRect">
-            <a:avLst>
-              <a:gd name="adj" fmla="val 10000"/>
+              <a:gd name="adj" fmla="val 6316"/>
             </a:avLst>
           </a:prstGeom>
           <a:solidFill>
@@ -4148,7 +4373,7 @@
           </a:solidFill>
           <a:ln w="15875">
             <a:solidFill>
-              <a:srgbClr val="D9DEE7"/>
+              <a:srgbClr val="08A6A6"/>
             </a:solidFill>
             <a:prstDash val="solid"/>
           </a:ln>
@@ -4156,14 +4381,14 @@
       </p:sp>
       <p:sp>
         <p:nvSpPr>
-          <p:cNvPr id="12" name="Text 10"/>
-          <p:cNvSpPr txBox="1"/>
-          <p:nvPr/>
-        </p:nvSpPr>
-        <p:spPr>
-          <a:xfrm>
-            <a:off x="914400" y="3236976"/>
-            <a:ext cx="9418320" cy="877824"/>
+          <p:cNvPr id="11" name="Text 9"/>
+          <p:cNvSpPr txBox="1"/>
+          <p:nvPr/>
+        </p:nvSpPr>
+        <p:spPr>
+          <a:xfrm>
+            <a:off x="6537960" y="2011680"/>
+            <a:ext cx="4754880" cy="365760"/>
           </a:xfrm>
           <a:prstGeom prst="rect">
             <a:avLst/>
@@ -4176,23 +4401,62 @@
           <a:lstStyle/>
           <a:p>
             <a:pPr indent="0" marL="0">
-              <a:lnSpc>
-                <a:spcPct val="118000"/>
-              </a:lnSpc>
-              <a:buNone/>
-            </a:pPr>
-            <a:r>
-              <a:rPr lang="en-US" sz="1700" dirty="0">
-                <a:solidFill>
-                  <a:srgbClr val="101828"/>
+              <a:buNone/>
+            </a:pPr>
+            <a:r>
+              <a:rPr lang="en-US" sz="1600" b="1" dirty="0">
+                <a:solidFill>
+                  <a:srgbClr val="08A6A6"/>
                 </a:solidFill>
                 <a:latin typeface="IBM Plex Sans" pitchFamily="34" charset="0"/>
                 <a:ea typeface="IBM Plex Sans" pitchFamily="34" charset="-122"/>
                 <a:cs typeface="IBM Plex Sans" pitchFamily="34" charset="-120"/>
               </a:rPr>
-              <a:t>Explain two measures a website can use to make brute-force attacks impractical.</a:t>
-            </a:r>
-            <a:endParaRPr lang="en-US" sz="1700" dirty="0"/>
+              <a:t>The top password</a:t>
+            </a:r>
+            <a:endParaRPr lang="en-US" sz="1600" dirty="0"/>
+          </a:p>
+        </p:txBody>
+      </p:sp>
+      <p:sp>
+        <p:nvSpPr>
+          <p:cNvPr id="12" name="Text 10"/>
+          <p:cNvSpPr txBox="1"/>
+          <p:nvPr/>
+        </p:nvSpPr>
+        <p:spPr>
+          <a:xfrm>
+            <a:off x="6537960" y="2395728"/>
+            <a:ext cx="4754880" cy="1005840"/>
+          </a:xfrm>
+          <a:prstGeom prst="rect">
+            <a:avLst/>
+          </a:prstGeom>
+          <a:noFill/>
+          <a:ln/>
+        </p:spPr>
+        <p:txBody>
+          <a:bodyPr wrap="square" lIns="0" tIns="0" rIns="0" bIns="0" rtlCol="0" anchor="t"/>
+          <a:lstStyle/>
+          <a:p>
+            <a:pPr indent="0" marL="0">
+              <a:lnSpc>
+                <a:spcPct val="120000"/>
+              </a:lnSpc>
+              <a:buNone/>
+            </a:pPr>
+            <a:r>
+              <a:rPr lang="en-US" sz="1300" dirty="0">
+                <a:solidFill>
+                  <a:srgbClr val="667085"/>
+                </a:solidFill>
+                <a:latin typeface="IBM Plex Sans" pitchFamily="34" charset="0"/>
+                <a:ea typeface="IBM Plex Sans" pitchFamily="34" charset="-122"/>
+                <a:cs typeface="IBM Plex Sans" pitchFamily="34" charset="-120"/>
+              </a:rPr>
+              <a:t>Lists of leaked passwords are still topped by '123456'. It's usually the first guess an attacker makes.</a:t>
+            </a:r>
+            <a:endParaRPr lang="en-US" sz="1300" dirty="0"/>
           </a:p>
         </p:txBody>
       </p:sp>
@@ -4204,73 +4468,12 @@
         </p:nvSpPr>
         <p:spPr>
           <a:xfrm>
-            <a:off x="10515600" y="3429000"/>
-            <a:ext cx="868680" cy="493776"/>
+            <a:off x="502920" y="3794760"/>
+            <a:ext cx="5394960" cy="1737360"/>
           </a:xfrm>
           <a:prstGeom prst="roundRect">
             <a:avLst>
-              <a:gd name="adj" fmla="val 18519"/>
-            </a:avLst>
-          </a:prstGeom>
-          <a:solidFill>
-            <a:srgbClr val="EEF2FB"/>
-          </a:solidFill>
-          <a:ln/>
-        </p:spPr>
-      </p:sp>
-      <p:sp>
-        <p:nvSpPr>
-          <p:cNvPr id="14" name="Text 12"/>
-          <p:cNvSpPr txBox="1"/>
-          <p:nvPr/>
-        </p:nvSpPr>
-        <p:spPr>
-          <a:xfrm>
-            <a:off x="10515600" y="3429000"/>
-            <a:ext cx="868680" cy="493776"/>
-          </a:xfrm>
-          <a:prstGeom prst="rect">
-            <a:avLst/>
-          </a:prstGeom>
-          <a:noFill/>
-          <a:ln/>
-        </p:spPr>
-        <p:txBody>
-          <a:bodyPr wrap="square" lIns="0" tIns="0" rIns="0" bIns="0" rtlCol="0" anchor="ctr"/>
-          <a:lstStyle/>
-          <a:p>
-            <a:pPr algn="ctr" indent="0" marL="0">
-              <a:buNone/>
-            </a:pPr>
-            <a:r>
-              <a:rPr lang="en-US" sz="1500" b="1" dirty="0">
-                <a:solidFill>
-                  <a:srgbClr val="2D63FF"/>
-                </a:solidFill>
-                <a:latin typeface="IBM Plex Mono" pitchFamily="34" charset="0"/>
-                <a:ea typeface="IBM Plex Mono" pitchFamily="34" charset="-122"/>
-                <a:cs typeface="IBM Plex Mono" pitchFamily="34" charset="-120"/>
-              </a:rPr>
-              <a:t>[4]</a:t>
-            </a:r>
-            <a:endParaRPr lang="en-US" sz="1500" dirty="0"/>
-          </a:p>
-        </p:txBody>
-      </p:sp>
-      <p:sp>
-        <p:nvSpPr>
-          <p:cNvPr id="15" name="Shape 13"/>
-          <p:cNvSpPr/>
-          <p:nvPr/>
-        </p:nvSpPr>
-        <p:spPr>
-          <a:xfrm>
-            <a:off x="502920" y="4425696"/>
-            <a:ext cx="11155680" cy="1097280"/>
-          </a:xfrm>
-          <a:prstGeom prst="roundRect">
-            <a:avLst>
-              <a:gd name="adj" fmla="val 10000"/>
+              <a:gd name="adj" fmla="val 6316"/>
             </a:avLst>
           </a:prstGeom>
           <a:solidFill>
@@ -4278,7 +4481,7 @@
           </a:solidFill>
           <a:ln w="15875">
             <a:solidFill>
-              <a:srgbClr val="D9DEE7"/>
+              <a:srgbClr val="2D63FF"/>
             </a:solidFill>
             <a:prstDash val="solid"/>
           </a:ln>
@@ -4286,14 +4489,14 @@
       </p:sp>
       <p:sp>
         <p:nvSpPr>
-          <p:cNvPr id="16" name="Text 14"/>
-          <p:cNvSpPr txBox="1"/>
-          <p:nvPr/>
-        </p:nvSpPr>
-        <p:spPr>
-          <a:xfrm>
-            <a:off x="914400" y="4535424"/>
-            <a:ext cx="9418320" cy="877824"/>
+          <p:cNvPr id="14" name="Text 12"/>
+          <p:cNvSpPr txBox="1"/>
+          <p:nvPr/>
+        </p:nvSpPr>
+        <p:spPr>
+          <a:xfrm>
+            <a:off x="822960" y="3977640"/>
+            <a:ext cx="4754880" cy="365760"/>
           </a:xfrm>
           <a:prstGeom prst="rect">
             <a:avLst/>
@@ -4306,47 +4509,130 @@
           <a:lstStyle/>
           <a:p>
             <a:pPr indent="0" marL="0">
-              <a:lnSpc>
-                <a:spcPct val="118000"/>
-              </a:lnSpc>
-              <a:buNone/>
-            </a:pPr>
-            <a:r>
-              <a:rPr lang="en-US" sz="1700" dirty="0">
-                <a:solidFill>
-                  <a:srgbClr val="101828"/>
+              <a:buNone/>
+            </a:pPr>
+            <a:r>
+              <a:rPr lang="en-US" sz="1600" b="1" dirty="0">
+                <a:solidFill>
+                  <a:srgbClr val="2D63FF"/>
                 </a:solidFill>
                 <a:latin typeface="IBM Plex Sans" pitchFamily="34" charset="0"/>
                 <a:ea typeface="IBM Plex Sans" pitchFamily="34" charset="-122"/>
                 <a:cs typeface="IBM Plex Sans" pitchFamily="34" charset="-120"/>
               </a:rPr>
-              <a:t>Explain why a long passphrase is harder to crack than a short complex password.</a:t>
-            </a:r>
-            <a:endParaRPr lang="en-US" sz="1700" dirty="0"/>
-          </a:p>
-        </p:txBody>
-      </p:sp>
-      <p:sp>
-        <p:nvSpPr>
-          <p:cNvPr id="17" name="Shape 15"/>
+              <a:t>Have I been pwned</a:t>
+            </a:r>
+            <a:endParaRPr lang="en-US" sz="1600" dirty="0"/>
+          </a:p>
+        </p:txBody>
+      </p:sp>
+      <p:sp>
+        <p:nvSpPr>
+          <p:cNvPr id="15" name="Text 13"/>
+          <p:cNvSpPr txBox="1"/>
+          <p:nvPr/>
+        </p:nvSpPr>
+        <p:spPr>
+          <a:xfrm>
+            <a:off x="822960" y="4361688"/>
+            <a:ext cx="4754880" cy="1005840"/>
+          </a:xfrm>
+          <a:prstGeom prst="rect">
+            <a:avLst/>
+          </a:prstGeom>
+          <a:noFill/>
+          <a:ln/>
+        </p:spPr>
+        <p:txBody>
+          <a:bodyPr wrap="square" lIns="0" tIns="0" rIns="0" bIns="0" rtlCol="0" anchor="t"/>
+          <a:lstStyle/>
+          <a:p>
+            <a:pPr indent="0" marL="0">
+              <a:lnSpc>
+                <a:spcPct val="120000"/>
+              </a:lnSpc>
+              <a:buNone/>
+            </a:pPr>
+            <a:r>
+              <a:rPr lang="en-US" sz="1300" dirty="0">
+                <a:solidFill>
+                  <a:srgbClr val="667085"/>
+                </a:solidFill>
+                <a:latin typeface="IBM Plex Sans" pitchFamily="34" charset="0"/>
+                <a:ea typeface="IBM Plex Sans" pitchFamily="34" charset="-122"/>
+                <a:cs typeface="IBM Plex Sans" pitchFamily="34" charset="-120"/>
+              </a:rPr>
+              <a:t>Free services let you check whether your email address has appeared in a known data breach, so you know which passwords to change.</a:t>
+            </a:r>
+            <a:endParaRPr lang="en-US" sz="1300" dirty="0"/>
+          </a:p>
+        </p:txBody>
+      </p:sp>
+      <p:sp>
+        <p:nvSpPr>
+          <p:cNvPr id="16" name="Shape 14"/>
           <p:cNvSpPr/>
           <p:nvPr/>
         </p:nvSpPr>
         <p:spPr>
           <a:xfrm>
-            <a:off x="10515600" y="4727448"/>
-            <a:ext cx="868680" cy="493776"/>
+            <a:off x="6217920" y="3794760"/>
+            <a:ext cx="5394960" cy="1737360"/>
           </a:xfrm>
           <a:prstGeom prst="roundRect">
             <a:avLst>
-              <a:gd name="adj" fmla="val 18519"/>
+              <a:gd name="adj" fmla="val 6316"/>
             </a:avLst>
           </a:prstGeom>
           <a:solidFill>
-            <a:srgbClr val="EEF2FB"/>
+            <a:srgbClr val="FFFFFF"/>
           </a:solidFill>
-          <a:ln/>
-        </p:spPr>
+          <a:ln w="15875">
+            <a:solidFill>
+              <a:srgbClr val="08A6A6"/>
+            </a:solidFill>
+            <a:prstDash val="solid"/>
+          </a:ln>
+        </p:spPr>
+      </p:sp>
+      <p:sp>
+        <p:nvSpPr>
+          <p:cNvPr id="17" name="Text 15"/>
+          <p:cNvSpPr txBox="1"/>
+          <p:nvPr/>
+        </p:nvSpPr>
+        <p:spPr>
+          <a:xfrm>
+            <a:off x="6537960" y="3977640"/>
+            <a:ext cx="4754880" cy="365760"/>
+          </a:xfrm>
+          <a:prstGeom prst="rect">
+            <a:avLst/>
+          </a:prstGeom>
+          <a:noFill/>
+          <a:ln/>
+        </p:spPr>
+        <p:txBody>
+          <a:bodyPr wrap="square" lIns="0" tIns="0" rIns="0" bIns="0" rtlCol="0" anchor="ctr"/>
+          <a:lstStyle/>
+          <a:p>
+            <a:pPr indent="0" marL="0">
+              <a:buNone/>
+            </a:pPr>
+            <a:r>
+              <a:rPr lang="en-US" sz="1600" b="1" dirty="0">
+                <a:solidFill>
+                  <a:srgbClr val="08A6A6"/>
+                </a:solidFill>
+                <a:latin typeface="IBM Plex Sans" pitchFamily="34" charset="0"/>
+                <a:ea typeface="IBM Plex Sans" pitchFamily="34" charset="-122"/>
+                <a:cs typeface="IBM Plex Sans" pitchFamily="34" charset="-120"/>
+              </a:rPr>
+              <a:t>Three random words</a:t>
+            </a:r>
+            <a:endParaRPr lang="en-US" sz="1600" dirty="0"/>
+          </a:p>
+        </p:txBody>
       </p:sp>
       <p:sp>
         <p:nvSpPr>
@@ -4356,34 +4642,37 @@
         </p:nvSpPr>
         <p:spPr>
           <a:xfrm>
-            <a:off x="10515600" y="4727448"/>
-            <a:ext cx="868680" cy="493776"/>
-          </a:xfrm>
-          <a:prstGeom prst="rect">
-            <a:avLst/>
-          </a:prstGeom>
-          <a:noFill/>
-          <a:ln/>
-        </p:spPr>
-        <p:txBody>
-          <a:bodyPr wrap="square" lIns="0" tIns="0" rIns="0" bIns="0" rtlCol="0" anchor="ctr"/>
-          <a:lstStyle/>
-          <a:p>
-            <a:pPr algn="ctr" indent="0" marL="0">
-              <a:buNone/>
-            </a:pPr>
-            <a:r>
-              <a:rPr lang="en-US" sz="1500" b="1" dirty="0">
-                <a:solidFill>
-                  <a:srgbClr val="2D63FF"/>
-                </a:solidFill>
-                <a:latin typeface="IBM Plex Mono" pitchFamily="34" charset="0"/>
-                <a:ea typeface="IBM Plex Mono" pitchFamily="34" charset="-122"/>
-                <a:cs typeface="IBM Plex Mono" pitchFamily="34" charset="-120"/>
-              </a:rPr>
-              <a:t>[3]</a:t>
-            </a:r>
-            <a:endParaRPr lang="en-US" sz="1500" dirty="0"/>
+            <a:off x="6537960" y="4361688"/>
+            <a:ext cx="4754880" cy="1005840"/>
+          </a:xfrm>
+          <a:prstGeom prst="rect">
+            <a:avLst/>
+          </a:prstGeom>
+          <a:noFill/>
+          <a:ln/>
+        </p:spPr>
+        <p:txBody>
+          <a:bodyPr wrap="square" lIns="0" tIns="0" rIns="0" bIns="0" rtlCol="0" anchor="t"/>
+          <a:lstStyle/>
+          <a:p>
+            <a:pPr indent="0" marL="0">
+              <a:lnSpc>
+                <a:spcPct val="120000"/>
+              </a:lnSpc>
+              <a:buNone/>
+            </a:pPr>
+            <a:r>
+              <a:rPr lang="en-US" sz="1300" dirty="0">
+                <a:solidFill>
+                  <a:srgbClr val="667085"/>
+                </a:solidFill>
+                <a:latin typeface="IBM Plex Sans" pitchFamily="34" charset="0"/>
+                <a:ea typeface="IBM Plex Sans" pitchFamily="34" charset="-122"/>
+                <a:cs typeface="IBM Plex Sans" pitchFamily="34" charset="-120"/>
+              </a:rPr>
+              <a:t>The UK's National Cyber Security Centre recommends three random words as a password: long, strong and easy to remember.</a:t>
+            </a:r>
+            <a:endParaRPr lang="en-US" sz="1300" dirty="0"/>
           </a:p>
         </p:txBody>
       </p:sp>
@@ -4398,6 +4687,604 @@
 <file path=ppt/slides/slide14.xml><?xml version="1.0" encoding="utf-8"?>
 <p:sld xmlns:a="http://schemas.openxmlformats.org/drawingml/2006/main" xmlns:r="http://schemas.openxmlformats.org/officeDocument/2006/relationships" xmlns:p="http://schemas.openxmlformats.org/presentationml/2006/main">
   <p:cSld name="Slide 14">
+    <p:bg>
+      <p:bgPr>
+        <a:solidFill>
+          <a:srgbClr val="F7F7F4"/>
+        </a:solidFill>
+      </p:bgPr>
+    </p:bg>
+    <p:spTree>
+      <p:nvGrpSpPr>
+        <p:cNvPr id="1" name=""/>
+        <p:cNvGrpSpPr/>
+        <p:nvPr/>
+      </p:nvGrpSpPr>
+      <p:grpSpPr>
+        <a:xfrm>
+          <a:off x="0" y="0"/>
+          <a:ext cx="0" cy="0"/>
+          <a:chOff x="0" y="0"/>
+          <a:chExt cx="0" cy="0"/>
+        </a:xfrm>
+      </p:grpSpPr>
+      <p:sp>
+        <p:nvSpPr>
+          <p:cNvPr id="2" name="Shape 0"/>
+          <p:cNvSpPr/>
+          <p:nvPr/>
+        </p:nvSpPr>
+        <p:spPr>
+          <a:xfrm>
+            <a:off x="0" y="0"/>
+            <a:ext cx="12188952" cy="82296"/>
+          </a:xfrm>
+          <a:prstGeom prst="rect">
+            <a:avLst/>
+          </a:prstGeom>
+          <a:solidFill>
+            <a:srgbClr val="2D63FF"/>
+          </a:solidFill>
+          <a:ln/>
+        </p:spPr>
+      </p:sp>
+      <p:sp>
+        <p:nvSpPr>
+          <p:cNvPr id="3" name="Text 1"/>
+          <p:cNvSpPr txBox="1"/>
+          <p:nvPr/>
+        </p:nvSpPr>
+        <p:spPr>
+          <a:xfrm>
+            <a:off x="502920" y="6236208"/>
+            <a:ext cx="7772400" cy="365760"/>
+          </a:xfrm>
+          <a:prstGeom prst="rect">
+            <a:avLst/>
+          </a:prstGeom>
+          <a:noFill/>
+          <a:ln/>
+        </p:spPr>
+        <p:txBody>
+          <a:bodyPr wrap="square" lIns="0" tIns="0" rIns="0" bIns="0" rtlCol="0" anchor="ctr"/>
+          <a:lstStyle/>
+          <a:p>
+            <a:pPr indent="0" marL="0">
+              <a:buNone/>
+            </a:pPr>
+            <a:r>
+              <a:rPr lang="en-US" sz="1100" dirty="0">
+                <a:solidFill>
+                  <a:srgbClr val="667085"/>
+                </a:solidFill>
+                <a:latin typeface="IBM Plex Mono" pitchFamily="34" charset="0"/>
+                <a:ea typeface="IBM Plex Mono" pitchFamily="34" charset="-122"/>
+                <a:cs typeface="IBM Plex Mono" pitchFamily="34" charset="-120"/>
+              </a:rPr>
+              <a:t>1.4 Network security  |  Lesson 6</a:t>
+            </a:r>
+            <a:endParaRPr lang="en-US" sz="1100" dirty="0"/>
+          </a:p>
+        </p:txBody>
+      </p:sp>
+      <p:sp>
+        <p:nvSpPr>
+          <p:cNvPr id="4" name="Text 2"/>
+          <p:cNvSpPr txBox="1"/>
+          <p:nvPr/>
+        </p:nvSpPr>
+        <p:spPr>
+          <a:xfrm>
+            <a:off x="9326880" y="6236208"/>
+            <a:ext cx="2377440" cy="365760"/>
+          </a:xfrm>
+          <a:prstGeom prst="rect">
+            <a:avLst/>
+          </a:prstGeom>
+          <a:noFill/>
+          <a:ln/>
+        </p:spPr>
+        <p:txBody>
+          <a:bodyPr wrap="square" lIns="0" tIns="0" rIns="0" bIns="0" rtlCol="0" anchor="ctr"/>
+          <a:lstStyle/>
+          <a:p>
+            <a:pPr algn="r" indent="0" marL="0">
+              <a:buNone/>
+            </a:pPr>
+            <a:r>
+              <a:rPr lang="en-US" sz="1100" dirty="0">
+                <a:solidFill>
+                  <a:srgbClr val="667085"/>
+                </a:solidFill>
+                <a:latin typeface="IBM Plex Mono" pitchFamily="34" charset="0"/>
+                <a:ea typeface="IBM Plex Mono" pitchFamily="34" charset="-122"/>
+                <a:cs typeface="IBM Plex Mono" pitchFamily="34" charset="-120"/>
+              </a:rPr>
+              <a:t>Revise 360</a:t>
+            </a:r>
+            <a:endParaRPr lang="en-US" sz="1100" dirty="0"/>
+          </a:p>
+        </p:txBody>
+      </p:sp>
+      <p:sp>
+        <p:nvSpPr>
+          <p:cNvPr id="5" name="Text 3"/>
+          <p:cNvSpPr txBox="1"/>
+          <p:nvPr/>
+        </p:nvSpPr>
+        <p:spPr>
+          <a:xfrm>
+            <a:off x="502920" y="411480"/>
+            <a:ext cx="11155680" cy="777240"/>
+          </a:xfrm>
+          <a:prstGeom prst="rect">
+            <a:avLst/>
+          </a:prstGeom>
+          <a:noFill/>
+          <a:ln/>
+        </p:spPr>
+        <p:txBody>
+          <a:bodyPr wrap="square" lIns="0" tIns="0" rIns="0" bIns="0" rtlCol="0" anchor="ctr"/>
+          <a:lstStyle/>
+          <a:p>
+            <a:pPr indent="0" marL="0">
+              <a:buNone/>
+            </a:pPr>
+            <a:r>
+              <a:rPr lang="en-US" sz="3200" b="1" dirty="0">
+                <a:solidFill>
+                  <a:srgbClr val="101828"/>
+                </a:solidFill>
+                <a:latin typeface="IBM Plex Sans" pitchFamily="34" charset="0"/>
+                <a:ea typeface="IBM Plex Sans" pitchFamily="34" charset="-122"/>
+                <a:cs typeface="IBM Plex Sans" pitchFamily="34" charset="-120"/>
+              </a:rPr>
+              <a:t>Exam practice</a:t>
+            </a:r>
+            <a:endParaRPr lang="en-US" sz="3200" dirty="0"/>
+          </a:p>
+        </p:txBody>
+      </p:sp>
+      <p:sp>
+        <p:nvSpPr>
+          <p:cNvPr id="6" name="Text 4"/>
+          <p:cNvSpPr txBox="1"/>
+          <p:nvPr/>
+        </p:nvSpPr>
+        <p:spPr>
+          <a:xfrm>
+            <a:off x="502920" y="1170432"/>
+            <a:ext cx="11155680" cy="411480"/>
+          </a:xfrm>
+          <a:prstGeom prst="rect">
+            <a:avLst/>
+          </a:prstGeom>
+          <a:noFill/>
+          <a:ln/>
+        </p:spPr>
+        <p:txBody>
+          <a:bodyPr wrap="square" lIns="0" tIns="0" rIns="0" bIns="0" rtlCol="0" anchor="ctr"/>
+          <a:lstStyle/>
+          <a:p>
+            <a:pPr indent="0" marL="0">
+              <a:buNone/>
+            </a:pPr>
+            <a:r>
+              <a:rPr lang="en-US" sz="1500" dirty="0">
+                <a:solidFill>
+                  <a:srgbClr val="667085"/>
+                </a:solidFill>
+                <a:latin typeface="IBM Plex Sans" pitchFamily="34" charset="0"/>
+                <a:ea typeface="IBM Plex Sans" pitchFamily="34" charset="-122"/>
+                <a:cs typeface="IBM Plex Sans" pitchFamily="34" charset="-120"/>
+              </a:rPr>
+              <a:t>Devices away. Answer from memory on the worksheet.</a:t>
+            </a:r>
+            <a:endParaRPr lang="en-US" sz="1500" dirty="0"/>
+          </a:p>
+        </p:txBody>
+      </p:sp>
+      <p:sp>
+        <p:nvSpPr>
+          <p:cNvPr id="7" name="Shape 5"/>
+          <p:cNvSpPr/>
+          <p:nvPr/>
+        </p:nvSpPr>
+        <p:spPr>
+          <a:xfrm>
+            <a:off x="502920" y="1828800"/>
+            <a:ext cx="11155680" cy="1097280"/>
+          </a:xfrm>
+          <a:prstGeom prst="roundRect">
+            <a:avLst>
+              <a:gd name="adj" fmla="val 10000"/>
+            </a:avLst>
+          </a:prstGeom>
+          <a:solidFill>
+            <a:srgbClr val="FFFFFF"/>
+          </a:solidFill>
+          <a:ln w="15875">
+            <a:solidFill>
+              <a:srgbClr val="D9DEE7"/>
+            </a:solidFill>
+            <a:prstDash val="solid"/>
+          </a:ln>
+        </p:spPr>
+      </p:sp>
+      <p:sp>
+        <p:nvSpPr>
+          <p:cNvPr id="8" name="Text 6"/>
+          <p:cNvSpPr txBox="1"/>
+          <p:nvPr/>
+        </p:nvSpPr>
+        <p:spPr>
+          <a:xfrm>
+            <a:off x="914400" y="1938528"/>
+            <a:ext cx="9418320" cy="877824"/>
+          </a:xfrm>
+          <a:prstGeom prst="rect">
+            <a:avLst/>
+          </a:prstGeom>
+          <a:noFill/>
+          <a:ln/>
+        </p:spPr>
+        <p:txBody>
+          <a:bodyPr wrap="square" lIns="0" tIns="0" rIns="0" bIns="0" rtlCol="0" anchor="ctr"/>
+          <a:lstStyle/>
+          <a:p>
+            <a:pPr indent="0" marL="0">
+              <a:lnSpc>
+                <a:spcPct val="118000"/>
+              </a:lnSpc>
+              <a:buNone/>
+            </a:pPr>
+            <a:r>
+              <a:rPr lang="en-US" sz="1700" dirty="0">
+                <a:solidFill>
+                  <a:srgbClr val="101828"/>
+                </a:solidFill>
+                <a:latin typeface="IBM Plex Sans" pitchFamily="34" charset="0"/>
+                <a:ea typeface="IBM Plex Sans" pitchFamily="34" charset="-122"/>
+                <a:cs typeface="IBM Plex Sans" pitchFamily="34" charset="-120"/>
+              </a:rPr>
+              <a:t>Describe how a brute-force attack works.</a:t>
+            </a:r>
+            <a:endParaRPr lang="en-US" sz="1700" dirty="0"/>
+          </a:p>
+        </p:txBody>
+      </p:sp>
+      <p:sp>
+        <p:nvSpPr>
+          <p:cNvPr id="9" name="Shape 7"/>
+          <p:cNvSpPr/>
+          <p:nvPr/>
+        </p:nvSpPr>
+        <p:spPr>
+          <a:xfrm>
+            <a:off x="10515600" y="2130552"/>
+            <a:ext cx="868680" cy="493776"/>
+          </a:xfrm>
+          <a:prstGeom prst="roundRect">
+            <a:avLst>
+              <a:gd name="adj" fmla="val 18519"/>
+            </a:avLst>
+          </a:prstGeom>
+          <a:solidFill>
+            <a:srgbClr val="EEF2FB"/>
+          </a:solidFill>
+          <a:ln/>
+        </p:spPr>
+      </p:sp>
+      <p:sp>
+        <p:nvSpPr>
+          <p:cNvPr id="10" name="Text 8"/>
+          <p:cNvSpPr txBox="1"/>
+          <p:nvPr/>
+        </p:nvSpPr>
+        <p:spPr>
+          <a:xfrm>
+            <a:off x="10515600" y="2130552"/>
+            <a:ext cx="868680" cy="493776"/>
+          </a:xfrm>
+          <a:prstGeom prst="rect">
+            <a:avLst/>
+          </a:prstGeom>
+          <a:noFill/>
+          <a:ln/>
+        </p:spPr>
+        <p:txBody>
+          <a:bodyPr wrap="square" lIns="0" tIns="0" rIns="0" bIns="0" rtlCol="0" anchor="ctr"/>
+          <a:lstStyle/>
+          <a:p>
+            <a:pPr algn="ctr" indent="0" marL="0">
+              <a:buNone/>
+            </a:pPr>
+            <a:r>
+              <a:rPr lang="en-US" sz="1500" b="1" dirty="0">
+                <a:solidFill>
+                  <a:srgbClr val="2D63FF"/>
+                </a:solidFill>
+                <a:latin typeface="IBM Plex Mono" pitchFamily="34" charset="0"/>
+                <a:ea typeface="IBM Plex Mono" pitchFamily="34" charset="-122"/>
+                <a:cs typeface="IBM Plex Mono" pitchFamily="34" charset="-120"/>
+              </a:rPr>
+              <a:t>[2]</a:t>
+            </a:r>
+            <a:endParaRPr lang="en-US" sz="1500" dirty="0"/>
+          </a:p>
+        </p:txBody>
+      </p:sp>
+      <p:sp>
+        <p:nvSpPr>
+          <p:cNvPr id="11" name="Shape 9"/>
+          <p:cNvSpPr/>
+          <p:nvPr/>
+        </p:nvSpPr>
+        <p:spPr>
+          <a:xfrm>
+            <a:off x="502920" y="3127248"/>
+            <a:ext cx="11155680" cy="1097280"/>
+          </a:xfrm>
+          <a:prstGeom prst="roundRect">
+            <a:avLst>
+              <a:gd name="adj" fmla="val 10000"/>
+            </a:avLst>
+          </a:prstGeom>
+          <a:solidFill>
+            <a:srgbClr val="FFFFFF"/>
+          </a:solidFill>
+          <a:ln w="15875">
+            <a:solidFill>
+              <a:srgbClr val="D9DEE7"/>
+            </a:solidFill>
+            <a:prstDash val="solid"/>
+          </a:ln>
+        </p:spPr>
+      </p:sp>
+      <p:sp>
+        <p:nvSpPr>
+          <p:cNvPr id="12" name="Text 10"/>
+          <p:cNvSpPr txBox="1"/>
+          <p:nvPr/>
+        </p:nvSpPr>
+        <p:spPr>
+          <a:xfrm>
+            <a:off x="914400" y="3236976"/>
+            <a:ext cx="9418320" cy="877824"/>
+          </a:xfrm>
+          <a:prstGeom prst="rect">
+            <a:avLst/>
+          </a:prstGeom>
+          <a:noFill/>
+          <a:ln/>
+        </p:spPr>
+        <p:txBody>
+          <a:bodyPr wrap="square" lIns="0" tIns="0" rIns="0" bIns="0" rtlCol="0" anchor="ctr"/>
+          <a:lstStyle/>
+          <a:p>
+            <a:pPr indent="0" marL="0">
+              <a:lnSpc>
+                <a:spcPct val="118000"/>
+              </a:lnSpc>
+              <a:buNone/>
+            </a:pPr>
+            <a:r>
+              <a:rPr lang="en-US" sz="1700" dirty="0">
+                <a:solidFill>
+                  <a:srgbClr val="101828"/>
+                </a:solidFill>
+                <a:latin typeface="IBM Plex Sans" pitchFamily="34" charset="0"/>
+                <a:ea typeface="IBM Plex Sans" pitchFamily="34" charset="-122"/>
+                <a:cs typeface="IBM Plex Sans" pitchFamily="34" charset="-120"/>
+              </a:rPr>
+              <a:t>Explain two measures a website can use to make brute-force attacks impractical.</a:t>
+            </a:r>
+            <a:endParaRPr lang="en-US" sz="1700" dirty="0"/>
+          </a:p>
+        </p:txBody>
+      </p:sp>
+      <p:sp>
+        <p:nvSpPr>
+          <p:cNvPr id="13" name="Shape 11"/>
+          <p:cNvSpPr/>
+          <p:nvPr/>
+        </p:nvSpPr>
+        <p:spPr>
+          <a:xfrm>
+            <a:off x="10515600" y="3429000"/>
+            <a:ext cx="868680" cy="493776"/>
+          </a:xfrm>
+          <a:prstGeom prst="roundRect">
+            <a:avLst>
+              <a:gd name="adj" fmla="val 18519"/>
+            </a:avLst>
+          </a:prstGeom>
+          <a:solidFill>
+            <a:srgbClr val="EEF2FB"/>
+          </a:solidFill>
+          <a:ln/>
+        </p:spPr>
+      </p:sp>
+      <p:sp>
+        <p:nvSpPr>
+          <p:cNvPr id="14" name="Text 12"/>
+          <p:cNvSpPr txBox="1"/>
+          <p:nvPr/>
+        </p:nvSpPr>
+        <p:spPr>
+          <a:xfrm>
+            <a:off x="10515600" y="3429000"/>
+            <a:ext cx="868680" cy="493776"/>
+          </a:xfrm>
+          <a:prstGeom prst="rect">
+            <a:avLst/>
+          </a:prstGeom>
+          <a:noFill/>
+          <a:ln/>
+        </p:spPr>
+        <p:txBody>
+          <a:bodyPr wrap="square" lIns="0" tIns="0" rIns="0" bIns="0" rtlCol="0" anchor="ctr"/>
+          <a:lstStyle/>
+          <a:p>
+            <a:pPr algn="ctr" indent="0" marL="0">
+              <a:buNone/>
+            </a:pPr>
+            <a:r>
+              <a:rPr lang="en-US" sz="1500" b="1" dirty="0">
+                <a:solidFill>
+                  <a:srgbClr val="2D63FF"/>
+                </a:solidFill>
+                <a:latin typeface="IBM Plex Mono" pitchFamily="34" charset="0"/>
+                <a:ea typeface="IBM Plex Mono" pitchFamily="34" charset="-122"/>
+                <a:cs typeface="IBM Plex Mono" pitchFamily="34" charset="-120"/>
+              </a:rPr>
+              <a:t>[4]</a:t>
+            </a:r>
+            <a:endParaRPr lang="en-US" sz="1500" dirty="0"/>
+          </a:p>
+        </p:txBody>
+      </p:sp>
+      <p:sp>
+        <p:nvSpPr>
+          <p:cNvPr id="15" name="Shape 13"/>
+          <p:cNvSpPr/>
+          <p:nvPr/>
+        </p:nvSpPr>
+        <p:spPr>
+          <a:xfrm>
+            <a:off x="502920" y="4425696"/>
+            <a:ext cx="11155680" cy="1097280"/>
+          </a:xfrm>
+          <a:prstGeom prst="roundRect">
+            <a:avLst>
+              <a:gd name="adj" fmla="val 10000"/>
+            </a:avLst>
+          </a:prstGeom>
+          <a:solidFill>
+            <a:srgbClr val="FFFFFF"/>
+          </a:solidFill>
+          <a:ln w="15875">
+            <a:solidFill>
+              <a:srgbClr val="D9DEE7"/>
+            </a:solidFill>
+            <a:prstDash val="solid"/>
+          </a:ln>
+        </p:spPr>
+      </p:sp>
+      <p:sp>
+        <p:nvSpPr>
+          <p:cNvPr id="16" name="Text 14"/>
+          <p:cNvSpPr txBox="1"/>
+          <p:nvPr/>
+        </p:nvSpPr>
+        <p:spPr>
+          <a:xfrm>
+            <a:off x="914400" y="4535424"/>
+            <a:ext cx="9418320" cy="877824"/>
+          </a:xfrm>
+          <a:prstGeom prst="rect">
+            <a:avLst/>
+          </a:prstGeom>
+          <a:noFill/>
+          <a:ln/>
+        </p:spPr>
+        <p:txBody>
+          <a:bodyPr wrap="square" lIns="0" tIns="0" rIns="0" bIns="0" rtlCol="0" anchor="ctr"/>
+          <a:lstStyle/>
+          <a:p>
+            <a:pPr indent="0" marL="0">
+              <a:lnSpc>
+                <a:spcPct val="118000"/>
+              </a:lnSpc>
+              <a:buNone/>
+            </a:pPr>
+            <a:r>
+              <a:rPr lang="en-US" sz="1700" dirty="0">
+                <a:solidFill>
+                  <a:srgbClr val="101828"/>
+                </a:solidFill>
+                <a:latin typeface="IBM Plex Sans" pitchFamily="34" charset="0"/>
+                <a:ea typeface="IBM Plex Sans" pitchFamily="34" charset="-122"/>
+                <a:cs typeface="IBM Plex Sans" pitchFamily="34" charset="-120"/>
+              </a:rPr>
+              <a:t>Explain why a long passphrase is harder to crack than a short complex password.</a:t>
+            </a:r>
+            <a:endParaRPr lang="en-US" sz="1700" dirty="0"/>
+          </a:p>
+        </p:txBody>
+      </p:sp>
+      <p:sp>
+        <p:nvSpPr>
+          <p:cNvPr id="17" name="Shape 15"/>
+          <p:cNvSpPr/>
+          <p:nvPr/>
+        </p:nvSpPr>
+        <p:spPr>
+          <a:xfrm>
+            <a:off x="10515600" y="4727448"/>
+            <a:ext cx="868680" cy="493776"/>
+          </a:xfrm>
+          <a:prstGeom prst="roundRect">
+            <a:avLst>
+              <a:gd name="adj" fmla="val 18519"/>
+            </a:avLst>
+          </a:prstGeom>
+          <a:solidFill>
+            <a:srgbClr val="EEF2FB"/>
+          </a:solidFill>
+          <a:ln/>
+        </p:spPr>
+      </p:sp>
+      <p:sp>
+        <p:nvSpPr>
+          <p:cNvPr id="18" name="Text 16"/>
+          <p:cNvSpPr txBox="1"/>
+          <p:nvPr/>
+        </p:nvSpPr>
+        <p:spPr>
+          <a:xfrm>
+            <a:off x="10515600" y="4727448"/>
+            <a:ext cx="868680" cy="493776"/>
+          </a:xfrm>
+          <a:prstGeom prst="rect">
+            <a:avLst/>
+          </a:prstGeom>
+          <a:noFill/>
+          <a:ln/>
+        </p:spPr>
+        <p:txBody>
+          <a:bodyPr wrap="square" lIns="0" tIns="0" rIns="0" bIns="0" rtlCol="0" anchor="ctr"/>
+          <a:lstStyle/>
+          <a:p>
+            <a:pPr algn="ctr" indent="0" marL="0">
+              <a:buNone/>
+            </a:pPr>
+            <a:r>
+              <a:rPr lang="en-US" sz="1500" b="1" dirty="0">
+                <a:solidFill>
+                  <a:srgbClr val="2D63FF"/>
+                </a:solidFill>
+                <a:latin typeface="IBM Plex Mono" pitchFamily="34" charset="0"/>
+                <a:ea typeface="IBM Plex Mono" pitchFamily="34" charset="-122"/>
+                <a:cs typeface="IBM Plex Mono" pitchFamily="34" charset="-120"/>
+              </a:rPr>
+              <a:t>[3]</a:t>
+            </a:r>
+            <a:endParaRPr lang="en-US" sz="1500" dirty="0"/>
+          </a:p>
+        </p:txBody>
+      </p:sp>
+    </p:spTree>
+  </p:cSld>
+  <p:clrMapOvr>
+    <a:masterClrMapping/>
+  </p:clrMapOvr>
+</p:sld>
+</file>
+
+<file path=ppt/slides/slide15.xml><?xml version="1.0" encoding="utf-8"?>
+<p:sld xmlns:a="http://schemas.openxmlformats.org/drawingml/2006/main" xmlns:r="http://schemas.openxmlformats.org/officeDocument/2006/relationships" xmlns:p="http://schemas.openxmlformats.org/presentationml/2006/main">
+  <p:cSld name="Slide 15">
     <p:bg>
       <p:bgPr>
         <a:solidFill>
